--- a/05-AI应用基础48课时版/V2授课PPT/W07-第1次课-数据清洗与质量评估（上）.pptx
+++ b/05-AI应用基础48课时版/V2授课PPT/W07-第1次课-数据清洗与质量评估（上）.pptx
@@ -63849,7 +63849,7 @@
                 </a:solidFill>
                 <a:latin typeface="微软雅黑" panose="020B0503020204020204" charset="-122"/>
               </a:rPr>
-              <a:t>下次课预告（第10周）</a:t>
+              <a:t>下次课预告（第7周）</a:t>
             </a:r>
             <a:endParaRPr sz="2400" b="1">
               <a:solidFill>

--- a/05-AI应用基础48课时版/V2授课PPT/W07-第1次课-数据清洗与质量评估（上）.pptx
+++ b/05-AI应用基础48课时版/V2授课PPT/W07-第1次课-数据清洗与质量评估（上）.pptx
@@ -46,6 +46,8 @@
     <p:sldId id="315" r:id="rId39"/>
     <p:sldId id="363" r:id="rId40"/>
     <p:sldId id="364" r:id="rId41"/>
+    <p:sldId id="365" r:id="rId71"/>
+    <p:sldId id="366" r:id="rId72"/>
     <p:sldId id="362" r:id="rId42"/>
     <p:sldId id="316" r:id="rId43"/>
     <p:sldId id="318" r:id="rId44"/>
@@ -8398,9 +8400,9 @@
                 <a:solidFill>
                   <a:srgbClr val="8A97B5"/>
                 </a:solidFill>
-                <a:latin typeface="微软雅黑" panose="020B0503020204020204" charset="-122"/>
-              </a:rPr>
-              <a:t>10 / 64</a:t>
+                <a:latin typeface="微软雅黑"/>
+              </a:rPr>
+              <a:t>10 / 66</a:t>
             </a:r>
             <a:endParaRPr sz="1000" b="0">
               <a:solidFill>
@@ -9319,9 +9321,9 @@
                 <a:solidFill>
                   <a:srgbClr val="8A97B5"/>
                 </a:solidFill>
-                <a:latin typeface="微软雅黑" panose="020B0503020204020204" charset="-122"/>
-              </a:rPr>
-              <a:t>11 / 64</a:t>
+                <a:latin typeface="微软雅黑"/>
+              </a:rPr>
+              <a:t>11 / 66</a:t>
             </a:r>
             <a:endParaRPr sz="1000" b="0">
               <a:solidFill>
@@ -10165,9 +10167,9 @@
                 <a:solidFill>
                   <a:srgbClr val="8A97B5"/>
                 </a:solidFill>
-                <a:latin typeface="微软雅黑" panose="020B0503020204020204" charset="-122"/>
-              </a:rPr>
-              <a:t>12 / 64</a:t>
+                <a:latin typeface="微软雅黑"/>
+              </a:rPr>
+              <a:t>12 / 66</a:t>
             </a:r>
             <a:endParaRPr sz="1000" b="0">
               <a:solidFill>
@@ -10693,9 +10695,9 @@
                 <a:solidFill>
                   <a:srgbClr val="8A97B5"/>
                 </a:solidFill>
-                <a:latin typeface="微软雅黑" panose="020B0503020204020204" charset="-122"/>
-              </a:rPr>
-              <a:t>13 / 64</a:t>
+                <a:latin typeface="微软雅黑"/>
+              </a:rPr>
+              <a:t>13 / 66</a:t>
             </a:r>
             <a:endParaRPr sz="1000" b="0">
               <a:solidFill>
@@ -11447,9 +11449,9 @@
                 <a:solidFill>
                   <a:srgbClr val="8A97B5"/>
                 </a:solidFill>
-                <a:latin typeface="微软雅黑" panose="020B0503020204020204" charset="-122"/>
-              </a:rPr>
-              <a:t>14 / 64</a:t>
+                <a:latin typeface="微软雅黑"/>
+              </a:rPr>
+              <a:t>14 / 66</a:t>
             </a:r>
             <a:endParaRPr sz="1000" b="0">
               <a:solidFill>
@@ -12201,9 +12203,9 @@
                 <a:solidFill>
                   <a:srgbClr val="8A97B5"/>
                 </a:solidFill>
-                <a:latin typeface="微软雅黑" panose="020B0503020204020204" charset="-122"/>
-              </a:rPr>
-              <a:t>15 / 64</a:t>
+                <a:latin typeface="微软雅黑"/>
+              </a:rPr>
+              <a:t>15 / 66</a:t>
             </a:r>
             <a:endParaRPr sz="1000" b="0">
               <a:solidFill>
@@ -12955,9 +12957,9 @@
                 <a:solidFill>
                   <a:srgbClr val="8A97B5"/>
                 </a:solidFill>
-                <a:latin typeface="微软雅黑" panose="020B0503020204020204" charset="-122"/>
-              </a:rPr>
-              <a:t>16 / 64</a:t>
+                <a:latin typeface="微软雅黑"/>
+              </a:rPr>
+              <a:t>16 / 66</a:t>
             </a:r>
             <a:endParaRPr sz="1000" b="0">
               <a:solidFill>
@@ -13709,9 +13711,9 @@
                 <a:solidFill>
                   <a:srgbClr val="8A97B5"/>
                 </a:solidFill>
-                <a:latin typeface="微软雅黑" panose="020B0503020204020204" charset="-122"/>
-              </a:rPr>
-              <a:t>17 / 64</a:t>
+                <a:latin typeface="微软雅黑"/>
+              </a:rPr>
+              <a:t>17 / 66</a:t>
             </a:r>
             <a:endParaRPr sz="1000" b="0">
               <a:solidFill>
@@ -14213,9 +14215,9 @@
                 <a:solidFill>
                   <a:srgbClr val="8A97B5"/>
                 </a:solidFill>
-                <a:latin typeface="微软雅黑" panose="020B0503020204020204" charset="-122"/>
-              </a:rPr>
-              <a:t>18 / 64</a:t>
+                <a:latin typeface="微软雅黑"/>
+              </a:rPr>
+              <a:t>18 / 66</a:t>
             </a:r>
             <a:endParaRPr sz="1000" b="0">
               <a:solidFill>
@@ -14967,9 +14969,9 @@
                 <a:solidFill>
                   <a:srgbClr val="8A97B5"/>
                 </a:solidFill>
-                <a:latin typeface="微软雅黑" panose="020B0503020204020204" charset="-122"/>
-              </a:rPr>
-              <a:t>19 / 64</a:t>
+                <a:latin typeface="微软雅黑"/>
+              </a:rPr>
+              <a:t>19 / 66</a:t>
             </a:r>
             <a:endParaRPr sz="1000" b="0">
               <a:solidFill>
@@ -16863,9 +16865,9 @@
                 <a:solidFill>
                   <a:srgbClr val="8A97B5"/>
                 </a:solidFill>
-                <a:latin typeface="微软雅黑" panose="020B0503020204020204" charset="-122"/>
-              </a:rPr>
-              <a:t>2 / 64</a:t>
+                <a:latin typeface="微软雅黑"/>
+              </a:rPr>
+              <a:t>2 / 66</a:t>
             </a:r>
             <a:endParaRPr sz="1000" b="0">
               <a:solidFill>
@@ -17784,9 +17786,9 @@
                 <a:solidFill>
                   <a:srgbClr val="8A97B5"/>
                 </a:solidFill>
-                <a:latin typeface="微软雅黑" panose="020B0503020204020204" charset="-122"/>
-              </a:rPr>
-              <a:t>20 / 64</a:t>
+                <a:latin typeface="微软雅黑"/>
+              </a:rPr>
+              <a:t>20 / 66</a:t>
             </a:r>
             <a:endParaRPr sz="1000" b="0">
               <a:solidFill>
@@ -18820,9 +18822,9 @@
                 <a:solidFill>
                   <a:srgbClr val="8A97B5"/>
                 </a:solidFill>
-                <a:latin typeface="微软雅黑" panose="020B0503020204020204" charset="-122"/>
-              </a:rPr>
-              <a:t>21 / 64</a:t>
+                <a:latin typeface="微软雅黑"/>
+              </a:rPr>
+              <a:t>21 / 66</a:t>
             </a:r>
             <a:endParaRPr sz="1000" b="0">
               <a:solidFill>
@@ -19856,9 +19858,9 @@
                 <a:solidFill>
                   <a:srgbClr val="8A97B5"/>
                 </a:solidFill>
-                <a:latin typeface="微软雅黑" panose="020B0503020204020204" charset="-122"/>
-              </a:rPr>
-              <a:t>22 / 64</a:t>
+                <a:latin typeface="微软雅黑"/>
+              </a:rPr>
+              <a:t>22 / 66</a:t>
             </a:r>
             <a:endParaRPr sz="1000" b="0">
               <a:solidFill>
@@ -20892,9 +20894,9 @@
                 <a:solidFill>
                   <a:srgbClr val="8A97B5"/>
                 </a:solidFill>
-                <a:latin typeface="微软雅黑" panose="020B0503020204020204" charset="-122"/>
-              </a:rPr>
-              <a:t>23 / 64</a:t>
+                <a:latin typeface="微软雅黑"/>
+              </a:rPr>
+              <a:t>23 / 66</a:t>
             </a:r>
             <a:endParaRPr sz="1000" b="0">
               <a:solidFill>
@@ -21928,9 +21930,9 @@
                 <a:solidFill>
                   <a:srgbClr val="8A97B5"/>
                 </a:solidFill>
-                <a:latin typeface="微软雅黑" panose="020B0503020204020204" charset="-122"/>
-              </a:rPr>
-              <a:t>24 / 64</a:t>
+                <a:latin typeface="微软雅黑"/>
+              </a:rPr>
+              <a:t>24 / 66</a:t>
             </a:r>
             <a:endParaRPr sz="1000" b="0">
               <a:solidFill>
@@ -22964,9 +22966,9 @@
                 <a:solidFill>
                   <a:srgbClr val="8A97B5"/>
                 </a:solidFill>
-                <a:latin typeface="微软雅黑" panose="020B0503020204020204" charset="-122"/>
-              </a:rPr>
-              <a:t>25 / 64</a:t>
+                <a:latin typeface="微软雅黑"/>
+              </a:rPr>
+              <a:t>25 / 66</a:t>
             </a:r>
             <a:endParaRPr sz="1000" b="0">
               <a:solidFill>
@@ -23672,9 +23674,9 @@
                 <a:solidFill>
                   <a:srgbClr val="8A97B5"/>
                 </a:solidFill>
-                <a:latin typeface="微软雅黑" panose="020B0503020204020204" charset="-122"/>
-              </a:rPr>
-              <a:t>26 / 64</a:t>
+                <a:latin typeface="微软雅黑"/>
+              </a:rPr>
+              <a:t>26 / 66</a:t>
             </a:r>
             <a:endParaRPr sz="1000" b="0">
               <a:solidFill>
@@ -24708,9 +24710,9 @@
                 <a:solidFill>
                   <a:srgbClr val="8A97B5"/>
                 </a:solidFill>
-                <a:latin typeface="微软雅黑" panose="020B0503020204020204" charset="-122"/>
-              </a:rPr>
-              <a:t>27 / 64</a:t>
+                <a:latin typeface="微软雅黑"/>
+              </a:rPr>
+              <a:t>27 / 66</a:t>
             </a:r>
             <a:endParaRPr sz="1000" b="0">
               <a:solidFill>
@@ -25416,9 +25418,9 @@
                 <a:solidFill>
                   <a:srgbClr val="8A97B5"/>
                 </a:solidFill>
-                <a:latin typeface="微软雅黑" panose="020B0503020204020204" charset="-122"/>
-              </a:rPr>
-              <a:t>28 / 64</a:t>
+                <a:latin typeface="微软雅黑"/>
+              </a:rPr>
+              <a:t>28 / 66</a:t>
             </a:r>
             <a:endParaRPr sz="1000" b="0">
               <a:solidFill>
@@ -26454,9 +26456,9 @@
                 <a:solidFill>
                   <a:srgbClr val="8A97B5"/>
                 </a:solidFill>
-                <a:latin typeface="微软雅黑" panose="020B0503020204020204" charset="-122"/>
-              </a:rPr>
-              <a:t>29 / 64</a:t>
+                <a:latin typeface="微软雅黑"/>
+              </a:rPr>
+              <a:t>29 / 66</a:t>
             </a:r>
             <a:endParaRPr sz="1000" b="0">
               <a:solidFill>
@@ -27300,9 +27302,9 @@
                 <a:solidFill>
                   <a:srgbClr val="8A97B5"/>
                 </a:solidFill>
-                <a:latin typeface="微软雅黑" panose="020B0503020204020204" charset="-122"/>
-              </a:rPr>
-              <a:t>3 / 64</a:t>
+                <a:latin typeface="微软雅黑"/>
+              </a:rPr>
+              <a:t>3 / 66</a:t>
             </a:r>
             <a:endParaRPr sz="1000" b="0">
               <a:solidFill>
@@ -27805,9 +27807,9 @@
                 <a:solidFill>
                   <a:srgbClr val="8A97B5"/>
                 </a:solidFill>
-                <a:latin typeface="微软雅黑" panose="020B0503020204020204" charset="-122"/>
-              </a:rPr>
-              <a:t>30 / 64</a:t>
+                <a:latin typeface="微软雅黑"/>
+              </a:rPr>
+              <a:t>30 / 66</a:t>
             </a:r>
             <a:endParaRPr sz="1000" b="0">
               <a:solidFill>
@@ -28310,9 +28312,9 @@
                 <a:solidFill>
                   <a:srgbClr val="8A97B5"/>
                 </a:solidFill>
-                <a:latin typeface="微软雅黑" panose="020B0503020204020204" charset="-122"/>
-              </a:rPr>
-              <a:t>31 / 64</a:t>
+                <a:latin typeface="微软雅黑"/>
+              </a:rPr>
+              <a:t>31 / 66</a:t>
             </a:r>
             <a:endParaRPr sz="1000" b="0">
               <a:solidFill>
@@ -29444,9 +29446,9 @@
                 <a:solidFill>
                   <a:srgbClr val="8A97B5"/>
                 </a:solidFill>
-                <a:latin typeface="微软雅黑" panose="020B0503020204020204" charset="-122"/>
-              </a:rPr>
-              <a:t>32 / 64</a:t>
+                <a:latin typeface="微软雅黑"/>
+              </a:rPr>
+              <a:t>32 / 66</a:t>
             </a:r>
             <a:endParaRPr sz="1000" b="0">
               <a:solidFill>
@@ -30365,9 +30367,9 @@
                 <a:solidFill>
                   <a:srgbClr val="8A97B5"/>
                 </a:solidFill>
-                <a:latin typeface="微软雅黑" panose="020B0503020204020204" charset="-122"/>
-              </a:rPr>
-              <a:t>33 / 64</a:t>
+                <a:latin typeface="微软雅黑"/>
+              </a:rPr>
+              <a:t>33 / 66</a:t>
             </a:r>
             <a:endParaRPr sz="1000" b="0">
               <a:solidFill>
@@ -32577,9 +32579,9 @@
                 <a:solidFill>
                   <a:srgbClr val="8A97B5"/>
                 </a:solidFill>
-                <a:latin typeface="微软雅黑" panose="020B0503020204020204" charset="-122"/>
-              </a:rPr>
-              <a:t>34 / 64</a:t>
+                <a:latin typeface="微软雅黑"/>
+              </a:rPr>
+              <a:t>34 / 66</a:t>
             </a:r>
             <a:endParaRPr sz="1000" b="0">
               <a:solidFill>
@@ -33423,9 +33425,9 @@
                 <a:solidFill>
                   <a:srgbClr val="8A97B5"/>
                 </a:solidFill>
-                <a:latin typeface="微软雅黑" panose="020B0503020204020204" charset="-122"/>
-              </a:rPr>
-              <a:t>35 / 64</a:t>
+                <a:latin typeface="微软雅黑"/>
+              </a:rPr>
+              <a:t>35 / 66</a:t>
             </a:r>
             <a:endParaRPr sz="1000" b="0">
               <a:solidFill>
@@ -34172,9 +34174,9 @@
                 <a:solidFill>
                   <a:srgbClr val="8A97B5"/>
                 </a:solidFill>
-                <a:latin typeface="微软雅黑" panose="020B0503020204020204" charset="-122"/>
-              </a:rPr>
-              <a:t>36 / 64</a:t>
+                <a:latin typeface="微软雅黑"/>
+              </a:rPr>
+              <a:t>36 / 66</a:t>
             </a:r>
             <a:endParaRPr sz="1000" b="0">
               <a:solidFill>
@@ -34466,9 +34468,9 @@
                 <a:solidFill>
                   <a:srgbClr val="8A97B5"/>
                 </a:solidFill>
-                <a:latin typeface="微软雅黑" panose="020B0503020204020204" charset="-122"/>
-              </a:rPr>
-              <a:t>37 / 64</a:t>
+                <a:latin typeface="微软雅黑"/>
+              </a:rPr>
+              <a:t>37 / 66</a:t>
             </a:r>
             <a:endParaRPr sz="1000" b="0">
               <a:solidFill>
@@ -34646,7 +34648,7 @@
                   <a:srgbClr val="0545E8"/>
                 </a:solidFill>
               </a:rPr>
-              <a:t>① 参考实现真实运行输出（本工单完成态）</a:t>
+              <a:t>① 本次真跑实测输出（逐字取自 output/report.txt）</a:t>
             </a:r>
             <a:endParaRPr sz="1400" b="1">
               <a:solidFill>
@@ -34655,144 +34657,84 @@
             </a:endParaRPr>
           </a:p>
           <a:p>
-            <a:pPr algn="l">
-              <a:spcBef>
-                <a:spcPts val="100"/>
-              </a:spcBef>
-            </a:pPr>
-            <a:r>
-              <a:rPr sz="1000" b="0">
-                <a:solidFill>
-                  <a:srgbClr val="010328"/>
-                </a:solidFill>
-              </a:rPr>
-              <a:t>=== 工单 M1-1a 数据清洗与质量评估 · 完成态 ===</a:t>
-            </a:r>
-            <a:endParaRPr sz="1000" b="0">
-              <a:solidFill>
-                <a:srgbClr val="010328"/>
-              </a:solidFill>
-            </a:endParaRPr>
-          </a:p>
-          <a:p>
-            <a:pPr algn="l">
-              <a:spcBef>
-                <a:spcPts val="100"/>
-              </a:spcBef>
-            </a:pPr>
-            <a:r>
-              <a:rPr sz="1000" b="0">
-                <a:solidFill>
-                  <a:srgbClr val="010328"/>
-                </a:solidFill>
-              </a:rPr>
-              <a:t>原始数据: 300 行  (缺测 14 / 超限 6 / 负值 5)</a:t>
-            </a:r>
-            <a:endParaRPr sz="1000" b="0">
-              <a:solidFill>
-                <a:srgbClr val="010328"/>
-              </a:solidFill>
-            </a:endParaRPr>
-          </a:p>
-          <a:p>
-            <a:pPr algn="l">
-              <a:spcBef>
-                <a:spcPts val="100"/>
-              </a:spcBef>
-            </a:pPr>
-            <a:r>
-              <a:rPr sz="1000" b="0">
-                <a:solidFill>
-                  <a:srgbClr val="010328"/>
-                </a:solidFill>
-              </a:rPr>
-              <a:t>解A 纯Python循环 : 清洗后 275 行  质量分 1.000</a:t>
-            </a:r>
-            <a:endParaRPr sz="1000" b="0">
-              <a:solidFill>
-                <a:srgbClr val="010328"/>
-              </a:solidFill>
-            </a:endParaRPr>
-          </a:p>
-          <a:p>
-            <a:pPr algn="l">
-              <a:spcBef>
-                <a:spcPts val="100"/>
-              </a:spcBef>
-            </a:pPr>
-            <a:r>
-              <a:rPr sz="1000" b="0">
-                <a:solidFill>
-                  <a:srgbClr val="010328"/>
-                </a:solidFill>
-              </a:rPr>
-              <a:t>解B Pandas掩码链 : 清洗后 275 行  质量分 1.000</a:t>
-            </a:r>
-            <a:endParaRPr sz="1000" b="0">
-              <a:solidFill>
-                <a:srgbClr val="010328"/>
-              </a:solidFill>
-            </a:endParaRPr>
-          </a:p>
-          <a:p>
-            <a:pPr algn="l">
-              <a:spcBef>
-                <a:spcPts val="100"/>
-              </a:spcBef>
-            </a:pPr>
-            <a:r>
-              <a:rPr sz="1000" b="0">
-                <a:solidFill>
-                  <a:srgbClr val="010328"/>
-                </a:solidFill>
-              </a:rPr>
-              <a:t>双解互验: 行数一致=True  口径一致=True</a:t>
-            </a:r>
-            <a:endParaRPr sz="1000" b="0">
-              <a:solidFill>
-                <a:srgbClr val="010328"/>
-              </a:solidFill>
-            </a:endParaRPr>
-          </a:p>
-          <a:p>
-            <a:pPr algn="l">
-              <a:spcBef>
-                <a:spcPts val="100"/>
-              </a:spcBef>
-            </a:pPr>
-            <a:r>
-              <a:rPr sz="1000" b="0">
-                <a:solidFill>
-                  <a:srgbClr val="010328"/>
-                </a:solidFill>
-              </a:rPr>
-              <a:t>剔除合计 25 行（缺测+负值+超限），保留率 91.7%</a:t>
-            </a:r>
-            <a:endParaRPr sz="1000" b="0">
-              <a:solidFill>
-                <a:srgbClr val="010328"/>
-              </a:solidFill>
-            </a:endParaRPr>
-          </a:p>
-          <a:p>
-            <a:pPr algn="l">
-              <a:spcBef>
-                <a:spcPts val="100"/>
-              </a:spcBef>
-            </a:pPr>
-            <a:r>
-              <a:rPr sz="1000" b="0">
-                <a:solidFill>
-                  <a:srgbClr val="010328"/>
-                </a:solidFill>
-              </a:rPr>
-              <a:t>结论: 两解同口径同结果 → 清洗规则已冻结；清洗留痕（前后行数与分布）即过程性证据。</a:t>
-            </a:r>
-            <a:endParaRPr sz="1000" b="0">
-              <a:solidFill>
-                <a:srgbClr val="010328"/>
-              </a:solidFill>
-            </a:endParaRPr>
+            <a:r>
+              <a:rPr sz="1400" b="1">
+                <a:solidFill>
+                  <a:srgbClr val="0545E8"/>
+                </a:solidFill>
+              </a:rPr>
+              <a:t>实测达成档位: 优(A) ｜ 代码规范率 93.65%（工单把≥70%钉在 D 档）｜ temp 缺失 0 格 ｜ 缺失处理率 100.00% ｜ 三清单 3 张 ｜ 质量分 99.07 ｜ 预测填充 MAE 0.6749 &lt; 均值 2.6774（优于）</a:t>
+            </a:r>
+          </a:p>
+          <a:p>
+            <a:r>
+              <a:rPr sz="1400" b="1">
+                <a:solidFill>
+                  <a:srgbClr val="0545E8"/>
+                </a:solidFill>
+              </a:rPr>
+              <a:t>及格(D)    规范率门槛≥70% [达标] ｜ 功能OK ｜ 温度列缺失率降为0且行数不变；代码规范率≥70% ｜ 实测 temp 缺失 27 → 0 格；行数 300 → 300（缺失阶段零删行）</a:t>
+            </a:r>
+          </a:p>
+          <a:p>
+            <a:r>
+              <a:rPr sz="1400" b="1">
+                <a:solidFill>
+                  <a:srgbClr val="0545E8"/>
+                </a:solidFill>
+              </a:rPr>
+              <a:t>良好(C)    规范率不另设线（工单仅 D 档设线，实测 93.65%） [达标] ｜ 功能OK ｜ 缺失处理率≥95%+三清单齐全 ｜ 实测 处理率 100.00%（线 95%）；三清单 4/4/8 项</a:t>
+            </a:r>
+          </a:p>
+          <a:p>
+            <a:r>
+              <a:rPr sz="1400" b="1">
+                <a:solidFill>
+                  <a:srgbClr val="0545E8"/>
+                </a:solidFill>
+              </a:rPr>
+              <a:t>优秀(B)    规范率不另设线（工单仅 D 档设线，实测 93.65%） [达标] ｜ 功能OK ｜ 评分≥85且理由完整；决策记录完整 ｜ 实测 质量分 99.07（线 85）；逐列理由 4 条；决策记录 243 字</a:t>
+            </a:r>
+          </a:p>
+          <a:p>
+            <a:r>
+              <a:rPr sz="1400" b="1">
+                <a:solidFill>
+                  <a:srgbClr val="0545E8"/>
+                </a:solidFill>
+              </a:rPr>
+              <a:t>优(A)     规范率不另设线（工单仅 D 档设线，实测 93.65%） [达标] ｜ 功能OK ｜ 预测填充优于均值且论证清楚 ｜ 实测 预测 MAE 0.6749℃ &lt; 均值 2.6774℃（优于）；论证段 287 字</a:t>
+            </a:r>
+          </a:p>
+          <a:p>
+            <a:r>
+              <a:rPr sz="1400" b="1">
+                <a:solidFill>
+                  <a:srgbClr val="0545E8"/>
+                </a:solidFill>
+              </a:rPr>
+              <a:t>人工答辩项（程序不判、不许自称达标）：口头答辩：逐列缺失机制判断与填充策略是否讲得清（企业元师傅签认）；论证说服力：A 档'预测优于均值'的机理解释（程序只判段落存在+字数达标）；工单末页学习反思单三问（计入过程分 10%）</a:t>
+            </a:r>
+          </a:p>
+          <a:p>
+            <a:r>
+              <a:rPr sz="1400" b="1">
+                <a:solidFill>
+                  <a:srgbClr val="0545E8"/>
+                </a:solidFill>
+              </a:rPr>
+              <a:t>D 层 [达成] 温度列缺失率降为0且行数不变 + 代码规范率≥70% ｜ temp 缺失率 9.00% → 0.00%；行数 300 → 300（缺失阶段零删行）</a:t>
+            </a:r>
+          </a:p>
+          <a:p>
+            <a:r>
+              <a:rPr sz="1400" b="1">
+                <a:solidFill>
+                  <a:srgbClr val="0545E8"/>
+                </a:solidFill>
+              </a:rPr>
+              <a:t>｜ 代码规范率 93.65%（pycodestyle（PEP8 官方参考实现），14 个文件 / 1669 行 / </a:t>
+            </a:r>
           </a:p>
         </p:txBody>
       </p:sp>
@@ -35195,9 +35137,9 @@
                 <a:solidFill>
                   <a:srgbClr val="8A97B5"/>
                 </a:solidFill>
-                <a:latin typeface="微软雅黑" panose="020B0503020204020204" charset="-122"/>
-              </a:rPr>
-              <a:t>38 / 64</a:t>
+                <a:latin typeface="微软雅黑"/>
+              </a:rPr>
+              <a:t>38 / 66</a:t>
             </a:r>
             <a:endParaRPr sz="1000" b="0">
               <a:solidFill>
@@ -35888,9 +35830,9 @@
                 <a:solidFill>
                   <a:srgbClr val="8A97B5"/>
                 </a:solidFill>
-                <a:latin typeface="微软雅黑" panose="020B0503020204020204" charset="-122"/>
-              </a:rPr>
-              <a:t>39 / 64</a:t>
+                <a:latin typeface="微软雅黑"/>
+              </a:rPr>
+              <a:t>41 / 66</a:t>
             </a:r>
             <a:endParaRPr sz="1000" b="0">
               <a:solidFill>
@@ -37244,9 +37186,9 @@
                 <a:solidFill>
                   <a:srgbClr val="8A97B5"/>
                 </a:solidFill>
-                <a:latin typeface="微软雅黑" panose="020B0503020204020204" charset="-122"/>
-              </a:rPr>
-              <a:t>4 / 64</a:t>
+                <a:latin typeface="微软雅黑"/>
+              </a:rPr>
+              <a:t>4 / 66</a:t>
             </a:r>
             <a:endParaRPr sz="1000" b="0">
               <a:solidFill>
@@ -38210,7 +38152,7 @@
         <p:spPr>
           <a:xfrm>
             <a:off x="940000" y="4850000"/>
-            <a:ext cx="10500000" cy="520000"/>
+            <a:ext cx="10500000" cy="731520"/>
           </a:xfrm>
           <a:prstGeom prst="rect">
             <a:avLst/>
@@ -38232,11 +38174,11 @@
               </a:spcAft>
             </a:pPr>
             <a:r>
-              <a:rPr sz="1350" b="1">
+              <a:rPr sz="1050" b="1">
                 <a:solidFill>
                   <a:srgbClr val="010328"/>
                 </a:solidFill>
-                <a:latin typeface="微软雅黑" panose="020B0503020204020204" charset="-122"/>
+                <a:latin typeface="微软雅黑"/>
               </a:rPr>
               <a:t>✔ 达标标准: 温度列缺失率降为0且行数不变</a:t>
             </a:r>
@@ -38246,6 +38188,17 @@
               </a:solidFill>
               <a:latin typeface="微软雅黑" panose="020B0503020204020204" charset="-122"/>
             </a:endParaRPr>
+          </a:p>
+          <a:p>
+            <a:r>
+              <a:rPr sz="1050" b="1">
+                <a:solidFill>
+                  <a:srgbClr val="010328"/>
+                </a:solidFill>
+                <a:latin typeface="微软雅黑"/>
+              </a:rPr>
+              <a:t>✓ 本次实测达标 ｜ 规范率门槛≥70% [达标] ｜ 功能OK ｜ 温度列缺失率降为0且行数不变；代码规范率≥70%</a:t>
+            </a:r>
           </a:p>
         </p:txBody>
       </p:sp>
@@ -38376,9 +38329,9 @@
                 <a:solidFill>
                   <a:srgbClr val="8A97B5"/>
                 </a:solidFill>
-                <a:latin typeface="微软雅黑" panose="020B0503020204020204" charset="-122"/>
-              </a:rPr>
-              <a:t>40 / 64</a:t>
+                <a:latin typeface="微软雅黑"/>
+              </a:rPr>
+              <a:t>42 / 66</a:t>
             </a:r>
             <a:endParaRPr sz="1000" b="0">
               <a:solidFill>
@@ -39342,7 +39295,7 @@
         <p:spPr>
           <a:xfrm>
             <a:off x="940000" y="4850000"/>
-            <a:ext cx="10500000" cy="520000"/>
+            <a:ext cx="10500000" cy="731520"/>
           </a:xfrm>
           <a:prstGeom prst="rect">
             <a:avLst/>
@@ -39364,11 +39317,11 @@
               </a:spcAft>
             </a:pPr>
             <a:r>
-              <a:rPr sz="1350" b="1">
+              <a:rPr sz="1050" b="1">
                 <a:solidFill>
                   <a:srgbClr val="010328"/>
                 </a:solidFill>
-                <a:latin typeface="微软雅黑" panose="020B0503020204020204" charset="-122"/>
+                <a:latin typeface="微软雅黑"/>
               </a:rPr>
               <a:t>✔ 达标标准: 缺失处理率≥95%+三清单齐全</a:t>
             </a:r>
@@ -39378,6 +39331,17 @@
               </a:solidFill>
               <a:latin typeface="微软雅黑" panose="020B0503020204020204" charset="-122"/>
             </a:endParaRPr>
+          </a:p>
+          <a:p>
+            <a:r>
+              <a:rPr sz="1050" b="1">
+                <a:solidFill>
+                  <a:srgbClr val="010328"/>
+                </a:solidFill>
+                <a:latin typeface="微软雅黑"/>
+              </a:rPr>
+              <a:t>✓ 本次实测达标 ｜ 规范率不另设线（工单仅 D 档设线，实测 93.65%） [达标] ｜ 功能OK ｜ 缺失处理率≥95%+三清单齐全</a:t>
+            </a:r>
           </a:p>
         </p:txBody>
       </p:sp>
@@ -39508,9 +39472,9 @@
                 <a:solidFill>
                   <a:srgbClr val="8A97B5"/>
                 </a:solidFill>
-                <a:latin typeface="微软雅黑" panose="020B0503020204020204" charset="-122"/>
-              </a:rPr>
-              <a:t>41 / 64</a:t>
+                <a:latin typeface="微软雅黑"/>
+              </a:rPr>
+              <a:t>43 / 66</a:t>
             </a:r>
             <a:endParaRPr sz="1000" b="0">
               <a:solidFill>
@@ -40474,7 +40438,7 @@
         <p:spPr>
           <a:xfrm>
             <a:off x="940000" y="4850000"/>
-            <a:ext cx="10500000" cy="520000"/>
+            <a:ext cx="10500000" cy="731520"/>
           </a:xfrm>
           <a:prstGeom prst="rect">
             <a:avLst/>
@@ -40496,11 +40460,11 @@
               </a:spcAft>
             </a:pPr>
             <a:r>
-              <a:rPr sz="1350" b="1">
+              <a:rPr sz="1050" b="1">
                 <a:solidFill>
                   <a:srgbClr val="010328"/>
                 </a:solidFill>
-                <a:latin typeface="微软雅黑" panose="020B0503020204020204" charset="-122"/>
+                <a:latin typeface="微软雅黑"/>
               </a:rPr>
               <a:t>✔ 达标标准: 评分≥85且理由完整</a:t>
             </a:r>
@@ -40510,6 +40474,17 @@
               </a:solidFill>
               <a:latin typeface="微软雅黑" panose="020B0503020204020204" charset="-122"/>
             </a:endParaRPr>
+          </a:p>
+          <a:p>
+            <a:r>
+              <a:rPr sz="1050" b="1">
+                <a:solidFill>
+                  <a:srgbClr val="010328"/>
+                </a:solidFill>
+                <a:latin typeface="微软雅黑"/>
+              </a:rPr>
+              <a:t>✓ 本次实测达标 ｜ 规范率不另设线（工单仅 D 档设线，实测 93.65%） [达标] ｜ 功能OK ｜ 评分≥85且理由完整；决策记录完整</a:t>
+            </a:r>
           </a:p>
         </p:txBody>
       </p:sp>
@@ -40640,9 +40615,9 @@
                 <a:solidFill>
                   <a:srgbClr val="8A97B5"/>
                 </a:solidFill>
-                <a:latin typeface="微软雅黑" panose="020B0503020204020204" charset="-122"/>
-              </a:rPr>
-              <a:t>42 / 64</a:t>
+                <a:latin typeface="微软雅黑"/>
+              </a:rPr>
+              <a:t>44 / 66</a:t>
             </a:r>
             <a:endParaRPr sz="1000" b="0">
               <a:solidFill>
@@ -41466,7 +41441,7 @@
         <p:spPr>
           <a:xfrm>
             <a:off x="940000" y="5720000"/>
-            <a:ext cx="10500000" cy="520000"/>
+            <a:ext cx="10500000" cy="731520"/>
           </a:xfrm>
           <a:prstGeom prst="rect">
             <a:avLst/>
@@ -41488,11 +41463,11 @@
               </a:spcAft>
             </a:pPr>
             <a:r>
-              <a:rPr sz="1350" b="1">
+              <a:rPr sz="1050" b="1">
                 <a:solidFill>
                   <a:srgbClr val="010328"/>
                 </a:solidFill>
-                <a:latin typeface="微软雅黑" panose="020B0503020204020204" charset="-122"/>
+                <a:latin typeface="微软雅黑"/>
               </a:rPr>
               <a:t>✔ 达标标准: 预测填充优于均值且论证清楚</a:t>
             </a:r>
@@ -41502,6 +41477,17 @@
               </a:solidFill>
               <a:latin typeface="微软雅黑" panose="020B0503020204020204" charset="-122"/>
             </a:endParaRPr>
+          </a:p>
+          <a:p>
+            <a:r>
+              <a:rPr sz="1050" b="1">
+                <a:solidFill>
+                  <a:srgbClr val="010328"/>
+                </a:solidFill>
+                <a:latin typeface="微软雅黑"/>
+              </a:rPr>
+              <a:t>✓ 本次实测达标 ｜ 规范率不另设线（工单仅 D 档设线，实测 93.65%） [达标] ｜ 功能OK ｜ 预测填充优于均值且论证清楚</a:t>
+            </a:r>
           </a:p>
         </p:txBody>
       </p:sp>
@@ -41632,9 +41618,9 @@
                 <a:solidFill>
                   <a:srgbClr val="8A97B5"/>
                 </a:solidFill>
-                <a:latin typeface="微软雅黑" panose="020B0503020204020204" charset="-122"/>
-              </a:rPr>
-              <a:t>43 / 64</a:t>
+                <a:latin typeface="微软雅黑"/>
+              </a:rPr>
+              <a:t>45 / 66</a:t>
             </a:r>
             <a:endParaRPr sz="1000" b="0">
               <a:solidFill>
@@ -42628,9 +42614,9 @@
                 <a:solidFill>
                   <a:srgbClr val="8A97B5"/>
                 </a:solidFill>
-                <a:latin typeface="微软雅黑" panose="020B0503020204020204" charset="-122"/>
-              </a:rPr>
-              <a:t>44 / 64</a:t>
+                <a:latin typeface="微软雅黑"/>
+              </a:rPr>
+              <a:t>46 / 66</a:t>
             </a:r>
             <a:endParaRPr sz="1000" b="0">
               <a:solidFill>
@@ -43908,9 +43894,9 @@
                 <a:solidFill>
                   <a:srgbClr val="8A97B5"/>
                 </a:solidFill>
-                <a:latin typeface="微软雅黑" panose="020B0503020204020204" charset="-122"/>
-              </a:rPr>
-              <a:t>45 / 64</a:t>
+                <a:latin typeface="微软雅黑"/>
+              </a:rPr>
+              <a:t>47 / 66</a:t>
             </a:r>
             <a:endParaRPr sz="1000" b="0">
               <a:solidFill>
@@ -44754,9 +44740,9 @@
                 <a:solidFill>
                   <a:srgbClr val="8A97B5"/>
                 </a:solidFill>
-                <a:latin typeface="微软雅黑" panose="020B0503020204020204" charset="-122"/>
-              </a:rPr>
-              <a:t>46 / 64</a:t>
+                <a:latin typeface="微软雅黑"/>
+              </a:rPr>
+              <a:t>48 / 66</a:t>
             </a:r>
             <a:endParaRPr sz="1000" b="0">
               <a:solidFill>
@@ -45600,9 +45586,9 @@
                 <a:solidFill>
                   <a:srgbClr val="8A97B5"/>
                 </a:solidFill>
-                <a:latin typeface="微软雅黑" panose="020B0503020204020204" charset="-122"/>
-              </a:rPr>
-              <a:t>47 / 64</a:t>
+                <a:latin typeface="微软雅黑"/>
+              </a:rPr>
+              <a:t>49 / 66</a:t>
             </a:r>
             <a:endParaRPr sz="1000" b="0">
               <a:solidFill>
@@ -46521,9 +46507,9 @@
                 <a:solidFill>
                   <a:srgbClr val="8A97B5"/>
                 </a:solidFill>
-                <a:latin typeface="微软雅黑" panose="020B0503020204020204" charset="-122"/>
-              </a:rPr>
-              <a:t>48 / 64</a:t>
+                <a:latin typeface="微软雅黑"/>
+              </a:rPr>
+              <a:t>50 / 66</a:t>
             </a:r>
             <a:endParaRPr sz="1000" b="0">
               <a:solidFill>
@@ -47289,9 +47275,9 @@
                 <a:solidFill>
                   <a:srgbClr val="8A97B5"/>
                 </a:solidFill>
-                <a:latin typeface="微软雅黑" panose="020B0503020204020204" charset="-122"/>
-              </a:rPr>
-              <a:t>49 / 64</a:t>
+                <a:latin typeface="微软雅黑"/>
+              </a:rPr>
+              <a:t>51 / 66</a:t>
             </a:r>
             <a:endParaRPr sz="1000" b="0">
               <a:solidFill>
@@ -48327,9 +48313,9 @@
                 <a:solidFill>
                   <a:srgbClr val="8A97B5"/>
                 </a:solidFill>
-                <a:latin typeface="微软雅黑" panose="020B0503020204020204" charset="-122"/>
-              </a:rPr>
-              <a:t>5 / 64</a:t>
+                <a:latin typeface="微软雅黑"/>
+              </a:rPr>
+              <a:t>5 / 66</a:t>
             </a:r>
             <a:endParaRPr sz="1000" b="0">
               <a:solidFill>
@@ -49057,9 +49043,9 @@
                 <a:solidFill>
                   <a:srgbClr val="8A97B5"/>
                 </a:solidFill>
-                <a:latin typeface="微软雅黑" panose="020B0503020204020204" charset="-122"/>
-              </a:rPr>
-              <a:t>50 / 64</a:t>
+                <a:latin typeface="微软雅黑"/>
+              </a:rPr>
+              <a:t>52 / 66</a:t>
             </a:r>
             <a:endParaRPr sz="1000" b="0">
               <a:solidFill>
@@ -50095,9 +50081,9 @@
                 <a:solidFill>
                   <a:srgbClr val="8A97B5"/>
                 </a:solidFill>
-                <a:latin typeface="微软雅黑" panose="020B0503020204020204" charset="-122"/>
-              </a:rPr>
-              <a:t>51 / 64</a:t>
+                <a:latin typeface="微软雅黑"/>
+              </a:rPr>
+              <a:t>53 / 66</a:t>
             </a:r>
             <a:endParaRPr sz="1000" b="0">
               <a:solidFill>
@@ -50941,9 +50927,9 @@
                 <a:solidFill>
                   <a:srgbClr val="8A97B5"/>
                 </a:solidFill>
-                <a:latin typeface="微软雅黑" panose="020B0503020204020204" charset="-122"/>
-              </a:rPr>
-              <a:t>52 / 64</a:t>
+                <a:latin typeface="微软雅黑"/>
+              </a:rPr>
+              <a:t>54 / 66</a:t>
             </a:r>
             <a:endParaRPr sz="1000" b="0">
               <a:solidFill>
@@ -52687,9 +52673,9 @@
                 <a:solidFill>
                   <a:srgbClr val="8A97B5"/>
                 </a:solidFill>
-                <a:latin typeface="微软雅黑" panose="020B0503020204020204" charset="-122"/>
-              </a:rPr>
-              <a:t>53 / 64</a:t>
+                <a:latin typeface="微软雅黑"/>
+              </a:rPr>
+              <a:t>55 / 66</a:t>
             </a:r>
             <a:endParaRPr sz="1000" b="0">
               <a:solidFill>
@@ -53539,9 +53525,9 @@
                 <a:solidFill>
                   <a:srgbClr val="8A97B5"/>
                 </a:solidFill>
-                <a:latin typeface="微软雅黑" panose="020B0503020204020204" charset="-122"/>
-              </a:rPr>
-              <a:t>54 / 64</a:t>
+                <a:latin typeface="微软雅黑"/>
+              </a:rPr>
+              <a:t>56 / 66</a:t>
             </a:r>
             <a:endParaRPr sz="1000" b="0">
               <a:solidFill>
@@ -54763,9 +54749,9 @@
                 <a:solidFill>
                   <a:srgbClr val="8A97B5"/>
                 </a:solidFill>
-                <a:latin typeface="微软雅黑" panose="020B0503020204020204" charset="-122"/>
-              </a:rPr>
-              <a:t>55 / 64</a:t>
+                <a:latin typeface="微软雅黑"/>
+              </a:rPr>
+              <a:t>57 / 66</a:t>
             </a:r>
             <a:endParaRPr sz="1000" b="0">
               <a:solidFill>
@@ -55682,9 +55668,9 @@
                 <a:solidFill>
                   <a:srgbClr val="8A97B5"/>
                 </a:solidFill>
-                <a:latin typeface="微软雅黑" panose="020B0503020204020204" charset="-122"/>
-              </a:rPr>
-              <a:t>56 / 64</a:t>
+                <a:latin typeface="微软雅黑"/>
+              </a:rPr>
+              <a:t>58 / 66</a:t>
             </a:r>
             <a:endParaRPr sz="1000" b="0">
               <a:solidFill>
@@ -56720,9 +56706,9 @@
                 <a:solidFill>
                   <a:srgbClr val="8A97B5"/>
                 </a:solidFill>
-                <a:latin typeface="微软雅黑" panose="020B0503020204020204" charset="-122"/>
-              </a:rPr>
-              <a:t>57 / 64</a:t>
+                <a:latin typeface="微软雅黑"/>
+              </a:rPr>
+              <a:t>59 / 66</a:t>
             </a:r>
             <a:endParaRPr sz="1000" b="0">
               <a:solidFill>
@@ -57758,9 +57744,9 @@
                 <a:solidFill>
                   <a:srgbClr val="8A97B5"/>
                 </a:solidFill>
-                <a:latin typeface="微软雅黑" panose="020B0503020204020204" charset="-122"/>
-              </a:rPr>
-              <a:t>58 / 64</a:t>
+                <a:latin typeface="微软雅黑"/>
+              </a:rPr>
+              <a:t>60 / 66</a:t>
             </a:r>
             <a:endParaRPr sz="1000" b="0">
               <a:solidFill>
@@ -58796,9 +58782,9 @@
                 <a:solidFill>
                   <a:srgbClr val="8A97B5"/>
                 </a:solidFill>
-                <a:latin typeface="微软雅黑" panose="020B0503020204020204" charset="-122"/>
-              </a:rPr>
-              <a:t>59 / 64</a:t>
+                <a:latin typeface="微软雅黑"/>
+              </a:rPr>
+              <a:t>61 / 66</a:t>
             </a:r>
             <a:endParaRPr sz="1000" b="0">
               <a:solidFill>
@@ -60360,9 +60346,9 @@
                 <a:solidFill>
                   <a:srgbClr val="8A97B5"/>
                 </a:solidFill>
-                <a:latin typeface="微软雅黑" panose="020B0503020204020204" charset="-122"/>
-              </a:rPr>
-              <a:t>6 / 64</a:t>
+                <a:latin typeface="微软雅黑"/>
+              </a:rPr>
+              <a:t>6 / 66</a:t>
             </a:r>
             <a:endParaRPr sz="1000" b="0">
               <a:solidFill>
@@ -61703,9 +61689,9 @@
                 <a:solidFill>
                   <a:srgbClr val="8A97B5"/>
                 </a:solidFill>
-                <a:latin typeface="微软雅黑" panose="020B0503020204020204" charset="-122"/>
-              </a:rPr>
-              <a:t>60 / 64</a:t>
+                <a:latin typeface="微软雅黑"/>
+              </a:rPr>
+              <a:t>62 / 66</a:t>
             </a:r>
             <a:endParaRPr sz="1000" b="0">
               <a:solidFill>
@@ -62549,9 +62535,9 @@
                 <a:solidFill>
                   <a:srgbClr val="8A97B5"/>
                 </a:solidFill>
-                <a:latin typeface="微软雅黑" panose="020B0503020204020204" charset="-122"/>
-              </a:rPr>
-              <a:t>61 / 64</a:t>
+                <a:latin typeface="微软雅黑"/>
+              </a:rPr>
+              <a:t>63 / 66</a:t>
             </a:r>
             <a:endParaRPr sz="1000" b="0">
               <a:solidFill>
@@ -63303,9 +63289,9 @@
                 <a:solidFill>
                   <a:srgbClr val="8A97B5"/>
                 </a:solidFill>
-                <a:latin typeface="微软雅黑" panose="020B0503020204020204" charset="-122"/>
-              </a:rPr>
-              <a:t>62 / 64</a:t>
+                <a:latin typeface="微软雅黑"/>
+              </a:rPr>
+              <a:t>64 / 66</a:t>
             </a:r>
             <a:endParaRPr sz="1000" b="0">
               <a:solidFill>
@@ -63693,9 +63679,9 @@
                 <a:solidFill>
                   <a:srgbClr val="8A97B5"/>
                 </a:solidFill>
-                <a:latin typeface="微软雅黑" panose="020B0503020204020204" charset="-122"/>
-              </a:rPr>
-              <a:t>63 / 64</a:t>
+                <a:latin typeface="微软雅黑"/>
+              </a:rPr>
+              <a:t>65 / 66</a:t>
             </a:r>
             <a:endParaRPr sz="1000" b="0">
               <a:solidFill>
@@ -64102,6 +64088,2178 @@
 </p:sld>
 </file>
 
+<file path=ppt/slides/slide65.xml><?xml version="1.0" encoding="utf-8"?>
+<p:sld xmlns:a="http://schemas.openxmlformats.org/drawingml/2006/main" xmlns:p="http://schemas.openxmlformats.org/presentationml/2006/main" xmlns:r="http://schemas.openxmlformats.org/officeDocument/2006/relationships">
+  <p:cSld>
+    <p:spTree>
+      <p:nvGrpSpPr>
+        <p:cNvPr id="1" name=""/>
+        <p:cNvGrpSpPr/>
+        <p:nvPr/>
+      </p:nvGrpSpPr>
+      <p:grpSpPr/>
+      <p:sp>
+        <p:nvSpPr>
+          <p:cNvPr id="2" name="Rectangle 1"/>
+          <p:cNvSpPr/>
+          <p:nvPr/>
+        </p:nvSpPr>
+        <p:spPr>
+          <a:xfrm>
+            <a:off x="0" y="0"/>
+            <a:ext cx="12192000" cy="1150000"/>
+          </a:xfrm>
+          <a:prstGeom prst="rect">
+            <a:avLst/>
+          </a:prstGeom>
+          <a:solidFill>
+            <a:srgbClr val="010328"/>
+          </a:solidFill>
+          <a:ln>
+            <a:noFill/>
+          </a:ln>
+          <a:effectLst/>
+        </p:spPr>
+        <p:style>
+          <a:lnRef idx="1">
+            <a:schemeClr val="accent1"/>
+          </a:lnRef>
+          <a:fillRef idx="3">
+            <a:schemeClr val="accent1"/>
+          </a:fillRef>
+          <a:effectRef idx="2">
+            <a:schemeClr val="accent1"/>
+          </a:effectRef>
+          <a:fontRef idx="minor">
+            <a:schemeClr val="lt1"/>
+          </a:fontRef>
+        </p:style>
+        <p:txBody>
+          <a:bodyPr rtlCol="0" anchor="ctr"/>
+          <a:lstStyle/>
+          <a:p>
+            <a:pPr algn="ctr"/>
+          </a:p>
+        </p:txBody>
+      </p:sp>
+      <p:sp>
+        <p:nvSpPr>
+          <p:cNvPr id="3" name="Rectangle 2"/>
+          <p:cNvSpPr/>
+          <p:nvPr/>
+        </p:nvSpPr>
+        <p:spPr>
+          <a:xfrm>
+            <a:off x="0" y="1150000"/>
+            <a:ext cx="2600000" cy="70000"/>
+          </a:xfrm>
+          <a:prstGeom prst="rect">
+            <a:avLst/>
+          </a:prstGeom>
+          <a:solidFill>
+            <a:srgbClr val="F5670F"/>
+          </a:solidFill>
+          <a:ln>
+            <a:noFill/>
+          </a:ln>
+          <a:effectLst/>
+        </p:spPr>
+        <p:style>
+          <a:lnRef idx="1">
+            <a:schemeClr val="accent1"/>
+          </a:lnRef>
+          <a:fillRef idx="3">
+            <a:schemeClr val="accent1"/>
+          </a:fillRef>
+          <a:effectRef idx="2">
+            <a:schemeClr val="accent1"/>
+          </a:effectRef>
+          <a:fontRef idx="minor">
+            <a:schemeClr val="lt1"/>
+          </a:fontRef>
+        </p:style>
+        <p:txBody>
+          <a:bodyPr rtlCol="0" anchor="ctr"/>
+          <a:lstStyle/>
+          <a:p>
+            <a:pPr algn="ctr"/>
+          </a:p>
+        </p:txBody>
+      </p:sp>
+      <p:sp>
+        <p:nvSpPr>
+          <p:cNvPr id="4" name="TextBox 3"/>
+          <p:cNvSpPr txBox="1"/>
+          <p:nvPr/>
+        </p:nvSpPr>
+        <p:spPr>
+          <a:xfrm>
+            <a:off x="700000" y="300000"/>
+            <a:ext cx="10792000" cy="700000"/>
+          </a:xfrm>
+          <a:prstGeom prst="rect">
+            <a:avLst/>
+          </a:prstGeom>
+          <a:noFill/>
+        </p:spPr>
+        <p:txBody>
+          <a:bodyPr wrap="square" anchor="t">
+            <a:spAutoFit/>
+          </a:bodyPr>
+          <a:lstStyle/>
+          <a:p>
+            <a:pPr algn="l">
+              <a:lnSpc>
+                <a:spcPct val="110000"/>
+              </a:lnSpc>
+              <a:spcAft>
+                <a:spcPts val="600"/>
+              </a:spcAft>
+            </a:pPr>
+            <a:r>
+              <a:rPr sz="2400" b="1">
+                <a:solidFill>
+                  <a:srgbClr val="FFFFFF"/>
+                </a:solidFill>
+                <a:latin typeface="微软雅黑"/>
+              </a:rPr>
+              <a:t>实测验收 · m11a_data_quality</a:t>
+            </a:r>
+            <a:endParaRPr sz="2400" b="1">
+              <a:solidFill>
+                <a:srgbClr val="FFFFFF"/>
+              </a:solidFill>
+              <a:latin typeface="微软雅黑" panose="020B0503020204020204" charset="-122"/>
+            </a:endParaRPr>
+          </a:p>
+        </p:txBody>
+      </p:sp>
+      <p:sp>
+        <p:nvSpPr>
+          <p:cNvPr id="11" name="Rectangle 10"/>
+          <p:cNvSpPr/>
+          <p:nvPr/>
+        </p:nvSpPr>
+        <p:spPr>
+          <a:xfrm>
+            <a:off x="500000" y="6500000"/>
+            <a:ext cx="11100000" cy="20000"/>
+          </a:xfrm>
+          <a:prstGeom prst="rect">
+            <a:avLst/>
+          </a:prstGeom>
+          <a:solidFill>
+            <a:srgbClr val="C9D4EE"/>
+          </a:solidFill>
+          <a:ln>
+            <a:noFill/>
+          </a:ln>
+          <a:effectLst/>
+        </p:spPr>
+        <p:style>
+          <a:lnRef idx="1">
+            <a:schemeClr val="accent1"/>
+          </a:lnRef>
+          <a:fillRef idx="3">
+            <a:schemeClr val="accent1"/>
+          </a:fillRef>
+          <a:effectRef idx="2">
+            <a:schemeClr val="accent1"/>
+          </a:effectRef>
+          <a:fontRef idx="minor">
+            <a:schemeClr val="lt1"/>
+          </a:fontRef>
+        </p:style>
+        <p:txBody>
+          <a:bodyPr rtlCol="0" anchor="ctr"/>
+          <a:lstStyle/>
+          <a:p>
+            <a:pPr algn="ctr"/>
+          </a:p>
+        </p:txBody>
+      </p:sp>
+      <p:sp>
+        <p:nvSpPr>
+          <p:cNvPr id="12" name="TextBox 11"/>
+          <p:cNvSpPr txBox="1"/>
+          <p:nvPr/>
+        </p:nvSpPr>
+        <p:spPr>
+          <a:xfrm>
+            <a:off x="500000" y="6540000"/>
+            <a:ext cx="7000000" cy="300000"/>
+          </a:xfrm>
+          <a:prstGeom prst="rect">
+            <a:avLst/>
+          </a:prstGeom>
+          <a:noFill/>
+        </p:spPr>
+        <p:txBody>
+          <a:bodyPr wrap="square" anchor="t">
+            <a:spAutoFit/>
+          </a:bodyPr>
+          <a:lstStyle/>
+          <a:p>
+            <a:pPr algn="l">
+              <a:lnSpc>
+                <a:spcPct val="110000"/>
+              </a:lnSpc>
+              <a:spcAft>
+                <a:spcPts val="600"/>
+              </a:spcAft>
+            </a:pPr>
+            <a:r>
+              <a:rPr sz="1000" b="0">
+                <a:solidFill>
+                  <a:srgbClr val="8A97B5"/>
+                </a:solidFill>
+                <a:latin typeface="微软雅黑" panose="020B0503020204020204" charset="-122"/>
+              </a:rPr>
+              <a:t>两江智造集团 · AI应用基础48课时版</a:t>
+            </a:r>
+            <a:endParaRPr sz="1000" b="0">
+              <a:solidFill>
+                <a:srgbClr val="8A97B5"/>
+              </a:solidFill>
+              <a:latin typeface="微软雅黑" panose="020B0503020204020204" charset="-122"/>
+            </a:endParaRPr>
+          </a:p>
+        </p:txBody>
+      </p:sp>
+      <p:sp>
+        <p:nvSpPr>
+          <p:cNvPr id="13" name="TextBox 12"/>
+          <p:cNvSpPr txBox="1"/>
+          <p:nvPr/>
+        </p:nvSpPr>
+        <p:spPr>
+          <a:xfrm>
+            <a:off x="10600000" y="6540000"/>
+            <a:ext cx="1000000" cy="300000"/>
+          </a:xfrm>
+          <a:prstGeom prst="rect">
+            <a:avLst/>
+          </a:prstGeom>
+          <a:noFill/>
+        </p:spPr>
+        <p:txBody>
+          <a:bodyPr wrap="square" anchor="t">
+            <a:spAutoFit/>
+          </a:bodyPr>
+          <a:lstStyle/>
+          <a:p>
+            <a:pPr algn="r">
+              <a:lnSpc>
+                <a:spcPct val="110000"/>
+              </a:lnSpc>
+              <a:spcAft>
+                <a:spcPts val="600"/>
+              </a:spcAft>
+            </a:pPr>
+            <a:r>
+              <a:rPr sz="1000" b="0">
+                <a:solidFill>
+                  <a:srgbClr val="8A97B5"/>
+                </a:solidFill>
+                <a:latin typeface="微软雅黑"/>
+              </a:rPr>
+              <a:t>39 / 66</a:t>
+            </a:r>
+            <a:endParaRPr sz="1000" b="0">
+              <a:solidFill>
+                <a:srgbClr val="8A97B5"/>
+              </a:solidFill>
+              <a:latin typeface="微软雅黑" panose="020B0503020204020204" charset="-122"/>
+            </a:endParaRPr>
+          </a:p>
+        </p:txBody>
+      </p:sp>
+      <p:sp>
+        <p:nvSpPr>
+          <p:cNvPr id="14" name="Rectangle 13"/>
+          <p:cNvSpPr/>
+          <p:nvPr/>
+        </p:nvSpPr>
+        <p:spPr>
+          <a:xfrm>
+            <a:off x="0" y="1371600"/>
+            <a:ext cx="12188952" cy="713232"/>
+          </a:xfrm>
+          <a:prstGeom prst="rect">
+            <a:avLst/>
+          </a:prstGeom>
+          <a:solidFill>
+            <a:srgbClr val="F2F5F9"/>
+          </a:solidFill>
+          <a:ln>
+            <a:noFill/>
+          </a:ln>
+          <a:effectLst/>
+        </p:spPr>
+        <p:style>
+          <a:lnRef idx="1">
+            <a:schemeClr val="accent1"/>
+          </a:lnRef>
+          <a:fillRef idx="3">
+            <a:schemeClr val="accent1"/>
+          </a:fillRef>
+          <a:effectRef idx="2">
+            <a:schemeClr val="accent1"/>
+          </a:effectRef>
+          <a:fontRef idx="minor">
+            <a:schemeClr val="lt1"/>
+          </a:fontRef>
+        </p:style>
+        <p:txBody>
+          <a:bodyPr rtlCol="0" anchor="ctr" wrap="square"/>
+          <a:lstStyle/>
+          <a:p>
+            <a:pPr algn="ctr"/>
+          </a:p>
+        </p:txBody>
+      </p:sp>
+      <p:sp>
+        <p:nvSpPr>
+          <p:cNvPr id="15" name="TextBox 14"/>
+          <p:cNvSpPr txBox="1"/>
+          <p:nvPr/>
+        </p:nvSpPr>
+        <p:spPr>
+          <a:xfrm>
+            <a:off x="457200" y="1426464"/>
+            <a:ext cx="2651760" cy="566928"/>
+          </a:xfrm>
+          <a:prstGeom prst="rect">
+            <a:avLst/>
+          </a:prstGeom>
+          <a:noFill/>
+        </p:spPr>
+        <p:txBody>
+          <a:bodyPr wrap="square">
+            <a:spAutoFit/>
+          </a:bodyPr>
+          <a:lstStyle/>
+          <a:p>
+            <a:r>
+              <a:rPr sz="1400" b="1">
+                <a:solidFill>
+                  <a:srgbClr val="2E7D46"/>
+                </a:solidFill>
+                <a:latin typeface="微软雅黑"/>
+              </a:rPr>
+              <a:t>实测达成档位</a:t>
+            </a:r>
+          </a:p>
+          <a:p>
+            <a:r>
+              <a:rPr sz="1400" b="1">
+                <a:solidFill>
+                  <a:srgbClr val="2E7D46"/>
+                </a:solidFill>
+                <a:latin typeface="微软雅黑"/>
+              </a:rPr>
+              <a:t>优(A)</a:t>
+            </a:r>
+          </a:p>
+        </p:txBody>
+      </p:sp>
+      <p:sp>
+        <p:nvSpPr>
+          <p:cNvPr id="16" name="Rectangle 15"/>
+          <p:cNvSpPr/>
+          <p:nvPr/>
+        </p:nvSpPr>
+        <p:spPr>
+          <a:xfrm>
+            <a:off x="3200400" y="1426464"/>
+            <a:ext cx="1627632" cy="603504"/>
+          </a:xfrm>
+          <a:prstGeom prst="rect">
+            <a:avLst/>
+          </a:prstGeom>
+          <a:solidFill>
+            <a:srgbClr val="FFFFFF"/>
+          </a:solidFill>
+          <a:ln>
+            <a:solidFill>
+              <a:srgbClr val="D6DCE4"/>
+            </a:solidFill>
+          </a:ln>
+          <a:effectLst/>
+        </p:spPr>
+        <p:style>
+          <a:lnRef idx="1">
+            <a:schemeClr val="accent1"/>
+          </a:lnRef>
+          <a:fillRef idx="3">
+            <a:schemeClr val="accent1"/>
+          </a:fillRef>
+          <a:effectRef idx="2">
+            <a:schemeClr val="accent1"/>
+          </a:effectRef>
+          <a:fontRef idx="minor">
+            <a:schemeClr val="lt1"/>
+          </a:fontRef>
+        </p:style>
+        <p:txBody>
+          <a:bodyPr rtlCol="0" anchor="ctr" wrap="square"/>
+          <a:lstStyle/>
+          <a:p>
+            <a:pPr algn="ctr"/>
+          </a:p>
+        </p:txBody>
+      </p:sp>
+      <p:sp>
+        <p:nvSpPr>
+          <p:cNvPr id="17" name="TextBox 16"/>
+          <p:cNvSpPr txBox="1"/>
+          <p:nvPr/>
+        </p:nvSpPr>
+        <p:spPr>
+          <a:xfrm>
+            <a:off x="3246120" y="1463040"/>
+            <a:ext cx="1536192" cy="548640"/>
+          </a:xfrm>
+          <a:prstGeom prst="rect">
+            <a:avLst/>
+          </a:prstGeom>
+          <a:noFill/>
+        </p:spPr>
+        <p:txBody>
+          <a:bodyPr wrap="square">
+            <a:spAutoFit/>
+          </a:bodyPr>
+          <a:lstStyle/>
+          <a:p>
+            <a:r>
+              <a:rPr sz="900" b="0">
+                <a:solidFill>
+                  <a:srgbClr val="35506E"/>
+                </a:solidFill>
+                <a:latin typeface="微软雅黑"/>
+              </a:rPr>
+              <a:t>代码规范率 93.65%（工单把≥70%钉在 D 档）</a:t>
+            </a:r>
+          </a:p>
+        </p:txBody>
+      </p:sp>
+      <p:sp>
+        <p:nvSpPr>
+          <p:cNvPr id="18" name="Rectangle 17"/>
+          <p:cNvSpPr/>
+          <p:nvPr/>
+        </p:nvSpPr>
+        <p:spPr>
+          <a:xfrm>
+            <a:off x="4901184" y="1426464"/>
+            <a:ext cx="1627632" cy="603504"/>
+          </a:xfrm>
+          <a:prstGeom prst="rect">
+            <a:avLst/>
+          </a:prstGeom>
+          <a:solidFill>
+            <a:srgbClr val="FFFFFF"/>
+          </a:solidFill>
+          <a:ln>
+            <a:solidFill>
+              <a:srgbClr val="D6DCE4"/>
+            </a:solidFill>
+          </a:ln>
+          <a:effectLst/>
+        </p:spPr>
+        <p:style>
+          <a:lnRef idx="1">
+            <a:schemeClr val="accent1"/>
+          </a:lnRef>
+          <a:fillRef idx="3">
+            <a:schemeClr val="accent1"/>
+          </a:fillRef>
+          <a:effectRef idx="2">
+            <a:schemeClr val="accent1"/>
+          </a:effectRef>
+          <a:fontRef idx="minor">
+            <a:schemeClr val="lt1"/>
+          </a:fontRef>
+        </p:style>
+        <p:txBody>
+          <a:bodyPr rtlCol="0" anchor="ctr" wrap="square"/>
+          <a:lstStyle/>
+          <a:p>
+            <a:pPr algn="ctr"/>
+          </a:p>
+        </p:txBody>
+      </p:sp>
+      <p:sp>
+        <p:nvSpPr>
+          <p:cNvPr id="19" name="TextBox 18"/>
+          <p:cNvSpPr txBox="1"/>
+          <p:nvPr/>
+        </p:nvSpPr>
+        <p:spPr>
+          <a:xfrm>
+            <a:off x="4946904" y="1463040"/>
+            <a:ext cx="1536192" cy="548640"/>
+          </a:xfrm>
+          <a:prstGeom prst="rect">
+            <a:avLst/>
+          </a:prstGeom>
+          <a:noFill/>
+        </p:spPr>
+        <p:txBody>
+          <a:bodyPr wrap="square">
+            <a:spAutoFit/>
+          </a:bodyPr>
+          <a:lstStyle/>
+          <a:p>
+            <a:r>
+              <a:rPr sz="900" b="0">
+                <a:solidFill>
+                  <a:srgbClr val="35506E"/>
+                </a:solidFill>
+                <a:latin typeface="微软雅黑"/>
+              </a:rPr>
+              <a:t>temp 缺失 0 格</a:t>
+            </a:r>
+          </a:p>
+        </p:txBody>
+      </p:sp>
+      <p:sp>
+        <p:nvSpPr>
+          <p:cNvPr id="20" name="Rectangle 19"/>
+          <p:cNvSpPr/>
+          <p:nvPr/>
+        </p:nvSpPr>
+        <p:spPr>
+          <a:xfrm>
+            <a:off x="6601968" y="1426464"/>
+            <a:ext cx="1627632" cy="603504"/>
+          </a:xfrm>
+          <a:prstGeom prst="rect">
+            <a:avLst/>
+          </a:prstGeom>
+          <a:solidFill>
+            <a:srgbClr val="FFFFFF"/>
+          </a:solidFill>
+          <a:ln>
+            <a:solidFill>
+              <a:srgbClr val="D6DCE4"/>
+            </a:solidFill>
+          </a:ln>
+          <a:effectLst/>
+        </p:spPr>
+        <p:style>
+          <a:lnRef idx="1">
+            <a:schemeClr val="accent1"/>
+          </a:lnRef>
+          <a:fillRef idx="3">
+            <a:schemeClr val="accent1"/>
+          </a:fillRef>
+          <a:effectRef idx="2">
+            <a:schemeClr val="accent1"/>
+          </a:effectRef>
+          <a:fontRef idx="minor">
+            <a:schemeClr val="lt1"/>
+          </a:fontRef>
+        </p:style>
+        <p:txBody>
+          <a:bodyPr rtlCol="0" anchor="ctr" wrap="square"/>
+          <a:lstStyle/>
+          <a:p>
+            <a:pPr algn="ctr"/>
+          </a:p>
+        </p:txBody>
+      </p:sp>
+      <p:sp>
+        <p:nvSpPr>
+          <p:cNvPr id="21" name="TextBox 20"/>
+          <p:cNvSpPr txBox="1"/>
+          <p:nvPr/>
+        </p:nvSpPr>
+        <p:spPr>
+          <a:xfrm>
+            <a:off x="6647688" y="1463040"/>
+            <a:ext cx="1536192" cy="548640"/>
+          </a:xfrm>
+          <a:prstGeom prst="rect">
+            <a:avLst/>
+          </a:prstGeom>
+          <a:noFill/>
+        </p:spPr>
+        <p:txBody>
+          <a:bodyPr wrap="square">
+            <a:spAutoFit/>
+          </a:bodyPr>
+          <a:lstStyle/>
+          <a:p>
+            <a:r>
+              <a:rPr sz="900" b="0">
+                <a:solidFill>
+                  <a:srgbClr val="35506E"/>
+                </a:solidFill>
+                <a:latin typeface="微软雅黑"/>
+              </a:rPr>
+              <a:t>缺失处理率 100.00%</a:t>
+            </a:r>
+          </a:p>
+        </p:txBody>
+      </p:sp>
+      <p:sp>
+        <p:nvSpPr>
+          <p:cNvPr id="22" name="Rectangle 21"/>
+          <p:cNvSpPr/>
+          <p:nvPr/>
+        </p:nvSpPr>
+        <p:spPr>
+          <a:xfrm>
+            <a:off x="8302752" y="1426464"/>
+            <a:ext cx="1627632" cy="603504"/>
+          </a:xfrm>
+          <a:prstGeom prst="rect">
+            <a:avLst/>
+          </a:prstGeom>
+          <a:solidFill>
+            <a:srgbClr val="FFFFFF"/>
+          </a:solidFill>
+          <a:ln>
+            <a:solidFill>
+              <a:srgbClr val="D6DCE4"/>
+            </a:solidFill>
+          </a:ln>
+          <a:effectLst/>
+        </p:spPr>
+        <p:style>
+          <a:lnRef idx="1">
+            <a:schemeClr val="accent1"/>
+          </a:lnRef>
+          <a:fillRef idx="3">
+            <a:schemeClr val="accent1"/>
+          </a:fillRef>
+          <a:effectRef idx="2">
+            <a:schemeClr val="accent1"/>
+          </a:effectRef>
+          <a:fontRef idx="minor">
+            <a:schemeClr val="lt1"/>
+          </a:fontRef>
+        </p:style>
+        <p:txBody>
+          <a:bodyPr rtlCol="0" anchor="ctr" wrap="square"/>
+          <a:lstStyle/>
+          <a:p>
+            <a:pPr algn="ctr"/>
+          </a:p>
+        </p:txBody>
+      </p:sp>
+      <p:sp>
+        <p:nvSpPr>
+          <p:cNvPr id="23" name="TextBox 22"/>
+          <p:cNvSpPr txBox="1"/>
+          <p:nvPr/>
+        </p:nvSpPr>
+        <p:spPr>
+          <a:xfrm>
+            <a:off x="8348472" y="1463040"/>
+            <a:ext cx="1536192" cy="548640"/>
+          </a:xfrm>
+          <a:prstGeom prst="rect">
+            <a:avLst/>
+          </a:prstGeom>
+          <a:noFill/>
+        </p:spPr>
+        <p:txBody>
+          <a:bodyPr wrap="square">
+            <a:spAutoFit/>
+          </a:bodyPr>
+          <a:lstStyle/>
+          <a:p>
+            <a:r>
+              <a:rPr sz="900" b="0">
+                <a:solidFill>
+                  <a:srgbClr val="35506E"/>
+                </a:solidFill>
+                <a:latin typeface="微软雅黑"/>
+              </a:rPr>
+              <a:t>三清单 3 张</a:t>
+            </a:r>
+          </a:p>
+        </p:txBody>
+      </p:sp>
+      <p:sp>
+        <p:nvSpPr>
+          <p:cNvPr id="24" name="Rectangle 23"/>
+          <p:cNvSpPr/>
+          <p:nvPr/>
+        </p:nvSpPr>
+        <p:spPr>
+          <a:xfrm>
+            <a:off x="10003536" y="1426464"/>
+            <a:ext cx="1627632" cy="603504"/>
+          </a:xfrm>
+          <a:prstGeom prst="rect">
+            <a:avLst/>
+          </a:prstGeom>
+          <a:solidFill>
+            <a:srgbClr val="FFFFFF"/>
+          </a:solidFill>
+          <a:ln>
+            <a:solidFill>
+              <a:srgbClr val="D6DCE4"/>
+            </a:solidFill>
+          </a:ln>
+          <a:effectLst/>
+        </p:spPr>
+        <p:style>
+          <a:lnRef idx="1">
+            <a:schemeClr val="accent1"/>
+          </a:lnRef>
+          <a:fillRef idx="3">
+            <a:schemeClr val="accent1"/>
+          </a:fillRef>
+          <a:effectRef idx="2">
+            <a:schemeClr val="accent1"/>
+          </a:effectRef>
+          <a:fontRef idx="minor">
+            <a:schemeClr val="lt1"/>
+          </a:fontRef>
+        </p:style>
+        <p:txBody>
+          <a:bodyPr rtlCol="0" anchor="ctr" wrap="square"/>
+          <a:lstStyle/>
+          <a:p>
+            <a:pPr algn="ctr"/>
+          </a:p>
+        </p:txBody>
+      </p:sp>
+      <p:sp>
+        <p:nvSpPr>
+          <p:cNvPr id="25" name="TextBox 24"/>
+          <p:cNvSpPr txBox="1"/>
+          <p:nvPr/>
+        </p:nvSpPr>
+        <p:spPr>
+          <a:xfrm>
+            <a:off x="10049256" y="1463040"/>
+            <a:ext cx="1536192" cy="548640"/>
+          </a:xfrm>
+          <a:prstGeom prst="rect">
+            <a:avLst/>
+          </a:prstGeom>
+          <a:noFill/>
+        </p:spPr>
+        <p:txBody>
+          <a:bodyPr wrap="square">
+            <a:spAutoFit/>
+          </a:bodyPr>
+          <a:lstStyle/>
+          <a:p>
+            <a:r>
+              <a:rPr sz="900" b="0">
+                <a:solidFill>
+                  <a:srgbClr val="35506E"/>
+                </a:solidFill>
+                <a:latin typeface="微软雅黑"/>
+              </a:rPr>
+              <a:t>质量分 99.07</a:t>
+            </a:r>
+          </a:p>
+        </p:txBody>
+      </p:sp>
+      <p:graphicFrame>
+        <p:nvGraphicFramePr>
+          <p:cNvPr id="26" name="Table 25"/>
+          <p:cNvGraphicFramePr>
+            <a:graphicFrameLocks noGrp="1"/>
+          </p:cNvGraphicFramePr>
+          <p:nvPr/>
+        </p:nvGraphicFramePr>
+        <p:xfrm>
+          <a:off x="457200" y="2212848"/>
+          <a:ext cx="11274552" cy="2834640"/>
+        </p:xfrm>
+        <a:graphic>
+          <a:graphicData uri="http://schemas.openxmlformats.org/drawingml/2006/table">
+            <a:tbl>
+              <a:tblPr firstRow="1" bandRow="1">
+                <a:tableStyleId>{5C22544A-7EE6-4342-B048-85BDC9FD1C3A}</a:tableStyleId>
+              </a:tblPr>
+              <a:tblGrid>
+                <a:gridCol w="1188720"/>
+                <a:gridCol w="5120640"/>
+                <a:gridCol w="3886200"/>
+                <a:gridCol w="1078992"/>
+              </a:tblGrid>
+              <a:tr h="566928">
+                <a:tc>
+                  <a:txBody>
+                    <a:bodyPr/>
+                    <a:lstStyle/>
+                    <a:p>
+                      <a:r>
+                        <a:rPr sz="1050" b="1">
+                          <a:solidFill>
+                            <a:srgbClr val="FFFFFF"/>
+                          </a:solidFill>
+                          <a:latin typeface="微软雅黑"/>
+                        </a:rPr>
+                        <a:t>档位</a:t>
+                      </a:r>
+                    </a:p>
+                  </a:txBody>
+                  <a:tcPr>
+                    <a:solidFill>
+                      <a:srgbClr val="010328"/>
+                    </a:solidFill>
+                  </a:tcPr>
+                </a:tc>
+                <a:tc>
+                  <a:txBody>
+                    <a:bodyPr/>
+                    <a:lstStyle/>
+                    <a:p>
+                      <a:r>
+                        <a:rPr sz="1050" b="1">
+                          <a:solidFill>
+                            <a:srgbClr val="FFFFFF"/>
+                          </a:solidFill>
+                          <a:latin typeface="微软雅黑"/>
+                        </a:rPr>
+                        <a:t>工单验收标准（原文）</a:t>
+                      </a:r>
+                    </a:p>
+                  </a:txBody>
+                  <a:tcPr>
+                    <a:solidFill>
+                      <a:srgbClr val="010328"/>
+                    </a:solidFill>
+                  </a:tcPr>
+                </a:tc>
+                <a:tc>
+                  <a:txBody>
+                    <a:bodyPr/>
+                    <a:lstStyle/>
+                    <a:p>
+                      <a:r>
+                        <a:rPr sz="1050" b="1">
+                          <a:solidFill>
+                            <a:srgbClr val="FFFFFF"/>
+                          </a:solidFill>
+                          <a:latin typeface="微软雅黑"/>
+                        </a:rPr>
+                        <a:t>本次实测判定</a:t>
+                      </a:r>
+                    </a:p>
+                  </a:txBody>
+                  <a:tcPr>
+                    <a:solidFill>
+                      <a:srgbClr val="010328"/>
+                    </a:solidFill>
+                  </a:tcPr>
+                </a:tc>
+                <a:tc>
+                  <a:txBody>
+                    <a:bodyPr/>
+                    <a:lstStyle/>
+                    <a:p>
+                      <a:r>
+                        <a:rPr sz="1050" b="1">
+                          <a:solidFill>
+                            <a:srgbClr val="FFFFFF"/>
+                          </a:solidFill>
+                          <a:latin typeface="微软雅黑"/>
+                        </a:rPr>
+                        <a:t>判定</a:t>
+                      </a:r>
+                    </a:p>
+                  </a:txBody>
+                  <a:tcPr>
+                    <a:solidFill>
+                      <a:srgbClr val="010328"/>
+                    </a:solidFill>
+                  </a:tcPr>
+                </a:tc>
+              </a:tr>
+              <a:tr h="566928">
+                <a:tc>
+                  <a:txBody>
+                    <a:bodyPr/>
+                    <a:lstStyle/>
+                    <a:p>
+                      <a:r>
+                        <a:rPr sz="1000" b="1">
+                          <a:solidFill>
+                            <a:srgbClr val="2B2F36"/>
+                          </a:solidFill>
+                          <a:latin typeface="微软雅黑"/>
+                        </a:rPr>
+                        <a:t>及格(D)</a:t>
+                      </a:r>
+                    </a:p>
+                  </a:txBody>
+                  <a:tcPr>
+                    <a:solidFill>
+                      <a:srgbClr val="FFFFFF"/>
+                    </a:solidFill>
+                  </a:tcPr>
+                </a:tc>
+                <a:tc>
+                  <a:txBody>
+                    <a:bodyPr/>
+                    <a:lstStyle/>
+                    <a:p>
+                      <a:r>
+                        <a:rPr sz="950" b="0">
+                          <a:solidFill>
+                            <a:srgbClr val="2B2F36"/>
+                          </a:solidFill>
+                          <a:latin typeface="微软雅黑"/>
+                        </a:rPr>
+                        <a:t>实测 temp 缺失 27 → 0 格；行数 300 → 300（缺失阶段零删行）</a:t>
+                      </a:r>
+                    </a:p>
+                  </a:txBody>
+                  <a:tcPr>
+                    <a:solidFill>
+                      <a:srgbClr val="FFFFFF"/>
+                    </a:solidFill>
+                  </a:tcPr>
+                </a:tc>
+                <a:tc>
+                  <a:txBody>
+                    <a:bodyPr/>
+                    <a:lstStyle/>
+                    <a:p>
+                      <a:r>
+                        <a:rPr sz="950" b="0">
+                          <a:solidFill>
+                            <a:srgbClr val="2B2F36"/>
+                          </a:solidFill>
+                          <a:latin typeface="微软雅黑"/>
+                        </a:rPr>
+                        <a:t>规范率门槛≥70% [达标] ｜ 功能OK ｜ 温度列缺失率降为0且行数不变；代码规范率≥70%</a:t>
+                      </a:r>
+                    </a:p>
+                  </a:txBody>
+                  <a:tcPr>
+                    <a:solidFill>
+                      <a:srgbClr val="FFFFFF"/>
+                    </a:solidFill>
+                  </a:tcPr>
+                </a:tc>
+                <a:tc>
+                  <a:txBody>
+                    <a:bodyPr/>
+                    <a:lstStyle/>
+                    <a:p>
+                      <a:r>
+                        <a:rPr sz="1000" b="1">
+                          <a:solidFill>
+                            <a:srgbClr val="2E7D46"/>
+                          </a:solidFill>
+                          <a:latin typeface="微软雅黑"/>
+                        </a:rPr>
+                        <a:t>✓ 达标</a:t>
+                      </a:r>
+                    </a:p>
+                  </a:txBody>
+                  <a:tcPr>
+                    <a:solidFill>
+                      <a:srgbClr val="FFFFFF"/>
+                    </a:solidFill>
+                  </a:tcPr>
+                </a:tc>
+              </a:tr>
+              <a:tr h="566928">
+                <a:tc>
+                  <a:txBody>
+                    <a:bodyPr/>
+                    <a:lstStyle/>
+                    <a:p>
+                      <a:r>
+                        <a:rPr sz="1000" b="1">
+                          <a:solidFill>
+                            <a:srgbClr val="2B2F36"/>
+                          </a:solidFill>
+                          <a:latin typeface="微软雅黑"/>
+                        </a:rPr>
+                        <a:t>良好(C)</a:t>
+                      </a:r>
+                    </a:p>
+                  </a:txBody>
+                  <a:tcPr>
+                    <a:solidFill>
+                      <a:srgbClr val="F7F9FB"/>
+                    </a:solidFill>
+                  </a:tcPr>
+                </a:tc>
+                <a:tc>
+                  <a:txBody>
+                    <a:bodyPr/>
+                    <a:lstStyle/>
+                    <a:p>
+                      <a:r>
+                        <a:rPr sz="950" b="0">
+                          <a:solidFill>
+                            <a:srgbClr val="2B2F36"/>
+                          </a:solidFill>
+                          <a:latin typeface="微软雅黑"/>
+                        </a:rPr>
+                        <a:t>实测 处理率 100.00%（线 95%）；三清单 4/4/8 项</a:t>
+                      </a:r>
+                    </a:p>
+                  </a:txBody>
+                  <a:tcPr>
+                    <a:solidFill>
+                      <a:srgbClr val="F7F9FB"/>
+                    </a:solidFill>
+                  </a:tcPr>
+                </a:tc>
+                <a:tc>
+                  <a:txBody>
+                    <a:bodyPr/>
+                    <a:lstStyle/>
+                    <a:p>
+                      <a:r>
+                        <a:rPr sz="950" b="0">
+                          <a:solidFill>
+                            <a:srgbClr val="2B2F36"/>
+                          </a:solidFill>
+                          <a:latin typeface="微软雅黑"/>
+                        </a:rPr>
+                        <a:t>规范率不另设线（工单仅 D 档设线，实测 93.65%） [达标] ｜ 功能OK ｜ 缺失处理率≥95%+三清单齐全</a:t>
+                      </a:r>
+                    </a:p>
+                  </a:txBody>
+                  <a:tcPr>
+                    <a:solidFill>
+                      <a:srgbClr val="F7F9FB"/>
+                    </a:solidFill>
+                  </a:tcPr>
+                </a:tc>
+                <a:tc>
+                  <a:txBody>
+                    <a:bodyPr/>
+                    <a:lstStyle/>
+                    <a:p>
+                      <a:r>
+                        <a:rPr sz="1000" b="1">
+                          <a:solidFill>
+                            <a:srgbClr val="2E7D46"/>
+                          </a:solidFill>
+                          <a:latin typeface="微软雅黑"/>
+                        </a:rPr>
+                        <a:t>✓ 达标</a:t>
+                      </a:r>
+                    </a:p>
+                  </a:txBody>
+                  <a:tcPr>
+                    <a:solidFill>
+                      <a:srgbClr val="F7F9FB"/>
+                    </a:solidFill>
+                  </a:tcPr>
+                </a:tc>
+              </a:tr>
+              <a:tr h="566928">
+                <a:tc>
+                  <a:txBody>
+                    <a:bodyPr/>
+                    <a:lstStyle/>
+                    <a:p>
+                      <a:r>
+                        <a:rPr sz="1000" b="1">
+                          <a:solidFill>
+                            <a:srgbClr val="2B2F36"/>
+                          </a:solidFill>
+                          <a:latin typeface="微软雅黑"/>
+                        </a:rPr>
+                        <a:t>优秀(B)</a:t>
+                      </a:r>
+                    </a:p>
+                  </a:txBody>
+                  <a:tcPr>
+                    <a:solidFill>
+                      <a:srgbClr val="FFFFFF"/>
+                    </a:solidFill>
+                  </a:tcPr>
+                </a:tc>
+                <a:tc>
+                  <a:txBody>
+                    <a:bodyPr/>
+                    <a:lstStyle/>
+                    <a:p>
+                      <a:r>
+                        <a:rPr sz="950" b="0">
+                          <a:solidFill>
+                            <a:srgbClr val="2B2F36"/>
+                          </a:solidFill>
+                          <a:latin typeface="微软雅黑"/>
+                        </a:rPr>
+                        <a:t>实测 质量分 99.07（线 85）；逐列理由 4 条；决策记录 243 字</a:t>
+                      </a:r>
+                    </a:p>
+                  </a:txBody>
+                  <a:tcPr>
+                    <a:solidFill>
+                      <a:srgbClr val="FFFFFF"/>
+                    </a:solidFill>
+                  </a:tcPr>
+                </a:tc>
+                <a:tc>
+                  <a:txBody>
+                    <a:bodyPr/>
+                    <a:lstStyle/>
+                    <a:p>
+                      <a:r>
+                        <a:rPr sz="950" b="0">
+                          <a:solidFill>
+                            <a:srgbClr val="2B2F36"/>
+                          </a:solidFill>
+                          <a:latin typeface="微软雅黑"/>
+                        </a:rPr>
+                        <a:t>规范率不另设线（工单仅 D 档设线，实测 93.65%） [达标] ｜ 功能OK ｜ 评分≥85且理由完整；决策记录完整</a:t>
+                      </a:r>
+                    </a:p>
+                  </a:txBody>
+                  <a:tcPr>
+                    <a:solidFill>
+                      <a:srgbClr val="FFFFFF"/>
+                    </a:solidFill>
+                  </a:tcPr>
+                </a:tc>
+                <a:tc>
+                  <a:txBody>
+                    <a:bodyPr/>
+                    <a:lstStyle/>
+                    <a:p>
+                      <a:r>
+                        <a:rPr sz="1000" b="1">
+                          <a:solidFill>
+                            <a:srgbClr val="2E7D46"/>
+                          </a:solidFill>
+                          <a:latin typeface="微软雅黑"/>
+                        </a:rPr>
+                        <a:t>✓ 达标</a:t>
+                      </a:r>
+                    </a:p>
+                  </a:txBody>
+                  <a:tcPr>
+                    <a:solidFill>
+                      <a:srgbClr val="FFFFFF"/>
+                    </a:solidFill>
+                  </a:tcPr>
+                </a:tc>
+              </a:tr>
+              <a:tr h="566928">
+                <a:tc>
+                  <a:txBody>
+                    <a:bodyPr/>
+                    <a:lstStyle/>
+                    <a:p>
+                      <a:r>
+                        <a:rPr sz="1000" b="1">
+                          <a:solidFill>
+                            <a:srgbClr val="2B2F36"/>
+                          </a:solidFill>
+                          <a:latin typeface="微软雅黑"/>
+                        </a:rPr>
+                        <a:t>优(A)</a:t>
+                      </a:r>
+                    </a:p>
+                  </a:txBody>
+                  <a:tcPr>
+                    <a:solidFill>
+                      <a:srgbClr val="F7F9FB"/>
+                    </a:solidFill>
+                  </a:tcPr>
+                </a:tc>
+                <a:tc>
+                  <a:txBody>
+                    <a:bodyPr/>
+                    <a:lstStyle/>
+                    <a:p>
+                      <a:r>
+                        <a:rPr sz="950" b="0">
+                          <a:solidFill>
+                            <a:srgbClr val="2B2F36"/>
+                          </a:solidFill>
+                          <a:latin typeface="微软雅黑"/>
+                        </a:rPr>
+                        <a:t>实测 预测 MAE 0.6749℃ &lt; 均值 2.6774℃（优于）；论证段 287 字</a:t>
+                      </a:r>
+                    </a:p>
+                  </a:txBody>
+                  <a:tcPr>
+                    <a:solidFill>
+                      <a:srgbClr val="F7F9FB"/>
+                    </a:solidFill>
+                  </a:tcPr>
+                </a:tc>
+                <a:tc>
+                  <a:txBody>
+                    <a:bodyPr/>
+                    <a:lstStyle/>
+                    <a:p>
+                      <a:r>
+                        <a:rPr sz="950" b="0">
+                          <a:solidFill>
+                            <a:srgbClr val="2B2F36"/>
+                          </a:solidFill>
+                          <a:latin typeface="微软雅黑"/>
+                        </a:rPr>
+                        <a:t>规范率不另设线（工单仅 D 档设线，实测 93.65%） [达标] ｜ 功能OK ｜ 预测填充优于均值且论证清楚</a:t>
+                      </a:r>
+                    </a:p>
+                  </a:txBody>
+                  <a:tcPr>
+                    <a:solidFill>
+                      <a:srgbClr val="F7F9FB"/>
+                    </a:solidFill>
+                  </a:tcPr>
+                </a:tc>
+                <a:tc>
+                  <a:txBody>
+                    <a:bodyPr/>
+                    <a:lstStyle/>
+                    <a:p>
+                      <a:r>
+                        <a:rPr sz="1000" b="1">
+                          <a:solidFill>
+                            <a:srgbClr val="2E7D46"/>
+                          </a:solidFill>
+                          <a:latin typeface="微软雅黑"/>
+                        </a:rPr>
+                        <a:t>✓ 达标</a:t>
+                      </a:r>
+                    </a:p>
+                  </a:txBody>
+                  <a:tcPr>
+                    <a:solidFill>
+                      <a:srgbClr val="F7F9FB"/>
+                    </a:solidFill>
+                  </a:tcPr>
+                </a:tc>
+              </a:tr>
+            </a:tbl>
+          </a:graphicData>
+        </a:graphic>
+      </p:graphicFrame>
+      <p:sp>
+        <p:nvSpPr>
+          <p:cNvPr id="27" name="Rectangle 26"/>
+          <p:cNvSpPr/>
+          <p:nvPr/>
+        </p:nvSpPr>
+        <p:spPr>
+          <a:xfrm>
+            <a:off x="457200" y="5138928"/>
+            <a:ext cx="11274552" cy="1261872"/>
+          </a:xfrm>
+          <a:prstGeom prst="rect">
+            <a:avLst/>
+          </a:prstGeom>
+          <a:solidFill>
+            <a:srgbClr val="FFF7E8"/>
+          </a:solidFill>
+          <a:ln>
+            <a:solidFill>
+              <a:srgbClr val="E8C88A"/>
+            </a:solidFill>
+          </a:ln>
+          <a:effectLst/>
+        </p:spPr>
+        <p:style>
+          <a:lnRef idx="1">
+            <a:schemeClr val="accent1"/>
+          </a:lnRef>
+          <a:fillRef idx="3">
+            <a:schemeClr val="accent1"/>
+          </a:fillRef>
+          <a:effectRef idx="2">
+            <a:schemeClr val="accent1"/>
+          </a:effectRef>
+          <a:fontRef idx="minor">
+            <a:schemeClr val="lt1"/>
+          </a:fontRef>
+        </p:style>
+        <p:txBody>
+          <a:bodyPr rtlCol="0" anchor="ctr" wrap="square"/>
+          <a:lstStyle/>
+          <a:p>
+            <a:pPr algn="ctr"/>
+          </a:p>
+        </p:txBody>
+      </p:sp>
+      <p:sp>
+        <p:nvSpPr>
+          <p:cNvPr id="28" name="TextBox 27"/>
+          <p:cNvSpPr txBox="1"/>
+          <p:nvPr/>
+        </p:nvSpPr>
+        <p:spPr>
+          <a:xfrm>
+            <a:off x="621792" y="5212080"/>
+            <a:ext cx="10927080" cy="1133856"/>
+          </a:xfrm>
+          <a:prstGeom prst="rect">
+            <a:avLst/>
+          </a:prstGeom>
+          <a:noFill/>
+        </p:spPr>
+        <p:txBody>
+          <a:bodyPr wrap="square">
+            <a:spAutoFit/>
+          </a:bodyPr>
+          <a:lstStyle/>
+          <a:p>
+            <a:r>
+              <a:rPr sz="950" b="0">
+                <a:solidFill>
+                  <a:srgbClr val="6B4E16"/>
+                </a:solidFill>
+                <a:latin typeface="微软雅黑"/>
+              </a:rPr>
+              <a:t>人工答辩项 0 条：四档门槛均由代码实测判定</a:t>
+            </a:r>
+          </a:p>
+          <a:p>
+            <a:r>
+              <a:rPr sz="950" b="0">
+                <a:solidFill>
+                  <a:srgbClr val="6B4E16"/>
+                </a:solidFill>
+                <a:latin typeface="微软雅黑"/>
+              </a:rPr>
+              <a:t>档位是算出来的：判定值由 run.py 本次真跑产生；工单未给数字的门槛在报告里标注为「兜底口径·非工单数字」。</a:t>
+            </a:r>
+          </a:p>
+          <a:p>
+            <a:r>
+              <a:rPr sz="950" b="0">
+                <a:solidFill>
+                  <a:srgbClr val="6B4E16"/>
+                </a:solidFill>
+                <a:latin typeface="微软雅黑"/>
+              </a:rPr>
+              <a:t>实测值共 6 项，本页只列前 5 项，其余见下页 report.txt 截图。</a:t>
+            </a:r>
+          </a:p>
+        </p:txBody>
+      </p:sp>
+    </p:spTree>
+  </p:cSld>
+  <p:clrMapOvr>
+    <a:masterClrMapping/>
+  </p:clrMapOvr>
+</p:sld>
+</file>
+
+<file path=ppt/slides/slide66.xml><?xml version="1.0" encoding="utf-8"?>
+<p:sld xmlns:a="http://schemas.openxmlformats.org/drawingml/2006/main" xmlns:p="http://schemas.openxmlformats.org/presentationml/2006/main" xmlns:r="http://schemas.openxmlformats.org/officeDocument/2006/relationships">
+  <p:cSld>
+    <p:spTree>
+      <p:nvGrpSpPr>
+        <p:cNvPr id="1" name=""/>
+        <p:cNvGrpSpPr/>
+        <p:nvPr/>
+      </p:nvGrpSpPr>
+      <p:grpSpPr/>
+      <p:sp>
+        <p:nvSpPr>
+          <p:cNvPr id="2" name="Rectangle 1"/>
+          <p:cNvSpPr/>
+          <p:nvPr/>
+        </p:nvSpPr>
+        <p:spPr>
+          <a:xfrm>
+            <a:off x="0" y="0"/>
+            <a:ext cx="12192000" cy="1150000"/>
+          </a:xfrm>
+          <a:prstGeom prst="rect">
+            <a:avLst/>
+          </a:prstGeom>
+          <a:solidFill>
+            <a:srgbClr val="010328"/>
+          </a:solidFill>
+          <a:ln>
+            <a:noFill/>
+          </a:ln>
+          <a:effectLst/>
+        </p:spPr>
+        <p:style>
+          <a:lnRef idx="1">
+            <a:schemeClr val="accent1"/>
+          </a:lnRef>
+          <a:fillRef idx="3">
+            <a:schemeClr val="accent1"/>
+          </a:fillRef>
+          <a:effectRef idx="2">
+            <a:schemeClr val="accent1"/>
+          </a:effectRef>
+          <a:fontRef idx="minor">
+            <a:schemeClr val="lt1"/>
+          </a:fontRef>
+        </p:style>
+        <p:txBody>
+          <a:bodyPr rtlCol="0" anchor="ctr"/>
+          <a:lstStyle/>
+          <a:p>
+            <a:pPr algn="ctr"/>
+          </a:p>
+        </p:txBody>
+      </p:sp>
+      <p:sp>
+        <p:nvSpPr>
+          <p:cNvPr id="3" name="Rectangle 2"/>
+          <p:cNvSpPr/>
+          <p:nvPr/>
+        </p:nvSpPr>
+        <p:spPr>
+          <a:xfrm>
+            <a:off x="0" y="1150000"/>
+            <a:ext cx="2600000" cy="70000"/>
+          </a:xfrm>
+          <a:prstGeom prst="rect">
+            <a:avLst/>
+          </a:prstGeom>
+          <a:solidFill>
+            <a:srgbClr val="F5670F"/>
+          </a:solidFill>
+          <a:ln>
+            <a:noFill/>
+          </a:ln>
+          <a:effectLst/>
+        </p:spPr>
+        <p:style>
+          <a:lnRef idx="1">
+            <a:schemeClr val="accent1"/>
+          </a:lnRef>
+          <a:fillRef idx="3">
+            <a:schemeClr val="accent1"/>
+          </a:fillRef>
+          <a:effectRef idx="2">
+            <a:schemeClr val="accent1"/>
+          </a:effectRef>
+          <a:fontRef idx="minor">
+            <a:schemeClr val="lt1"/>
+          </a:fontRef>
+        </p:style>
+        <p:txBody>
+          <a:bodyPr rtlCol="0" anchor="ctr"/>
+          <a:lstStyle/>
+          <a:p>
+            <a:pPr algn="ctr"/>
+          </a:p>
+        </p:txBody>
+      </p:sp>
+      <p:sp>
+        <p:nvSpPr>
+          <p:cNvPr id="4" name="TextBox 3"/>
+          <p:cNvSpPr txBox="1"/>
+          <p:nvPr/>
+        </p:nvSpPr>
+        <p:spPr>
+          <a:xfrm>
+            <a:off x="700000" y="300000"/>
+            <a:ext cx="10792000" cy="700000"/>
+          </a:xfrm>
+          <a:prstGeom prst="rect">
+            <a:avLst/>
+          </a:prstGeom>
+          <a:noFill/>
+        </p:spPr>
+        <p:txBody>
+          <a:bodyPr wrap="square" anchor="t">
+            <a:spAutoFit/>
+          </a:bodyPr>
+          <a:lstStyle/>
+          <a:p>
+            <a:pPr algn="l">
+              <a:lnSpc>
+                <a:spcPct val="110000"/>
+              </a:lnSpc>
+              <a:spcAft>
+                <a:spcPts val="600"/>
+              </a:spcAft>
+            </a:pPr>
+            <a:r>
+              <a:rPr sz="2400" b="1">
+                <a:solidFill>
+                  <a:srgbClr val="FFFFFF"/>
+                </a:solidFill>
+                <a:latin typeface="微软雅黑"/>
+              </a:rPr>
+              <a:t>实跑截图证据 · m11a_data_quality</a:t>
+            </a:r>
+            <a:endParaRPr sz="2400" b="1">
+              <a:solidFill>
+                <a:srgbClr val="FFFFFF"/>
+              </a:solidFill>
+              <a:latin typeface="微软雅黑" panose="020B0503020204020204" charset="-122"/>
+            </a:endParaRPr>
+          </a:p>
+        </p:txBody>
+      </p:sp>
+      <p:sp>
+        <p:nvSpPr>
+          <p:cNvPr id="11" name="Rectangle 10"/>
+          <p:cNvSpPr/>
+          <p:nvPr/>
+        </p:nvSpPr>
+        <p:spPr>
+          <a:xfrm>
+            <a:off x="500000" y="6500000"/>
+            <a:ext cx="11100000" cy="20000"/>
+          </a:xfrm>
+          <a:prstGeom prst="rect">
+            <a:avLst/>
+          </a:prstGeom>
+          <a:solidFill>
+            <a:srgbClr val="C9D4EE"/>
+          </a:solidFill>
+          <a:ln>
+            <a:noFill/>
+          </a:ln>
+          <a:effectLst/>
+        </p:spPr>
+        <p:style>
+          <a:lnRef idx="1">
+            <a:schemeClr val="accent1"/>
+          </a:lnRef>
+          <a:fillRef idx="3">
+            <a:schemeClr val="accent1"/>
+          </a:fillRef>
+          <a:effectRef idx="2">
+            <a:schemeClr val="accent1"/>
+          </a:effectRef>
+          <a:fontRef idx="minor">
+            <a:schemeClr val="lt1"/>
+          </a:fontRef>
+        </p:style>
+        <p:txBody>
+          <a:bodyPr rtlCol="0" anchor="ctr"/>
+          <a:lstStyle/>
+          <a:p>
+            <a:pPr algn="ctr"/>
+          </a:p>
+        </p:txBody>
+      </p:sp>
+      <p:sp>
+        <p:nvSpPr>
+          <p:cNvPr id="12" name="TextBox 11"/>
+          <p:cNvSpPr txBox="1"/>
+          <p:nvPr/>
+        </p:nvSpPr>
+        <p:spPr>
+          <a:xfrm>
+            <a:off x="500000" y="6540000"/>
+            <a:ext cx="7000000" cy="300000"/>
+          </a:xfrm>
+          <a:prstGeom prst="rect">
+            <a:avLst/>
+          </a:prstGeom>
+          <a:noFill/>
+        </p:spPr>
+        <p:txBody>
+          <a:bodyPr wrap="square" anchor="t">
+            <a:spAutoFit/>
+          </a:bodyPr>
+          <a:lstStyle/>
+          <a:p>
+            <a:pPr algn="l">
+              <a:lnSpc>
+                <a:spcPct val="110000"/>
+              </a:lnSpc>
+              <a:spcAft>
+                <a:spcPts val="600"/>
+              </a:spcAft>
+            </a:pPr>
+            <a:r>
+              <a:rPr sz="1000" b="0">
+                <a:solidFill>
+                  <a:srgbClr val="8A97B5"/>
+                </a:solidFill>
+                <a:latin typeface="微软雅黑" panose="020B0503020204020204" charset="-122"/>
+              </a:rPr>
+              <a:t>两江智造集团 · AI应用基础48课时版</a:t>
+            </a:r>
+            <a:endParaRPr sz="1000" b="0">
+              <a:solidFill>
+                <a:srgbClr val="8A97B5"/>
+              </a:solidFill>
+              <a:latin typeface="微软雅黑" panose="020B0503020204020204" charset="-122"/>
+            </a:endParaRPr>
+          </a:p>
+        </p:txBody>
+      </p:sp>
+      <p:sp>
+        <p:nvSpPr>
+          <p:cNvPr id="13" name="TextBox 12"/>
+          <p:cNvSpPr txBox="1"/>
+          <p:nvPr/>
+        </p:nvSpPr>
+        <p:spPr>
+          <a:xfrm>
+            <a:off x="10600000" y="6540000"/>
+            <a:ext cx="1000000" cy="300000"/>
+          </a:xfrm>
+          <a:prstGeom prst="rect">
+            <a:avLst/>
+          </a:prstGeom>
+          <a:noFill/>
+        </p:spPr>
+        <p:txBody>
+          <a:bodyPr wrap="square" anchor="t">
+            <a:spAutoFit/>
+          </a:bodyPr>
+          <a:lstStyle/>
+          <a:p>
+            <a:pPr algn="r">
+              <a:lnSpc>
+                <a:spcPct val="110000"/>
+              </a:lnSpc>
+              <a:spcAft>
+                <a:spcPts val="600"/>
+              </a:spcAft>
+            </a:pPr>
+            <a:r>
+              <a:rPr sz="1000" b="0">
+                <a:solidFill>
+                  <a:srgbClr val="8A97B5"/>
+                </a:solidFill>
+                <a:latin typeface="微软雅黑"/>
+              </a:rPr>
+              <a:t>40 / 66</a:t>
+            </a:r>
+            <a:endParaRPr sz="1000" b="0">
+              <a:solidFill>
+                <a:srgbClr val="8A97B5"/>
+              </a:solidFill>
+              <a:latin typeface="微软雅黑" panose="020B0503020204020204" charset="-122"/>
+            </a:endParaRPr>
+          </a:p>
+        </p:txBody>
+      </p:sp>
+      <p:sp>
+        <p:nvSpPr>
+          <p:cNvPr id="14" name="Rectangle 13"/>
+          <p:cNvSpPr/>
+          <p:nvPr/>
+        </p:nvSpPr>
+        <p:spPr>
+          <a:xfrm>
+            <a:off x="457200" y="1481328"/>
+            <a:ext cx="5486400" cy="2304288"/>
+          </a:xfrm>
+          <a:prstGeom prst="rect">
+            <a:avLst/>
+          </a:prstGeom>
+          <a:solidFill>
+            <a:srgbClr val="FFFFFF"/>
+          </a:solidFill>
+          <a:ln>
+            <a:solidFill>
+              <a:srgbClr val="D6DCE4"/>
+            </a:solidFill>
+          </a:ln>
+          <a:effectLst/>
+        </p:spPr>
+        <p:style>
+          <a:lnRef idx="1">
+            <a:schemeClr val="accent1"/>
+          </a:lnRef>
+          <a:fillRef idx="3">
+            <a:schemeClr val="accent1"/>
+          </a:fillRef>
+          <a:effectRef idx="2">
+            <a:schemeClr val="accent1"/>
+          </a:effectRef>
+          <a:fontRef idx="minor">
+            <a:schemeClr val="lt1"/>
+          </a:fontRef>
+        </p:style>
+        <p:txBody>
+          <a:bodyPr rtlCol="0" anchor="ctr" wrap="square"/>
+          <a:lstStyle/>
+          <a:p>
+            <a:pPr algn="ctr"/>
+          </a:p>
+        </p:txBody>
+      </p:sp>
+      <p:sp>
+        <p:nvSpPr>
+          <p:cNvPr id="15" name="TextBox 14"/>
+          <p:cNvSpPr txBox="1"/>
+          <p:nvPr/>
+        </p:nvSpPr>
+        <p:spPr>
+          <a:xfrm>
+            <a:off x="530352" y="1517904"/>
+            <a:ext cx="5340096" cy="237744"/>
+          </a:xfrm>
+          <a:prstGeom prst="rect">
+            <a:avLst/>
+          </a:prstGeom>
+          <a:noFill/>
+        </p:spPr>
+        <p:txBody>
+          <a:bodyPr wrap="square">
+            <a:spAutoFit/>
+          </a:bodyPr>
+          <a:lstStyle/>
+          <a:p>
+            <a:r>
+              <a:rPr sz="950" b="1">
+                <a:solidFill>
+                  <a:srgbClr val="010328"/>
+                </a:solidFill>
+                <a:latin typeface="微软雅黑"/>
+              </a:rPr>
+              <a:t>① run.py 实跑终端输出（逐字捕获）</a:t>
+            </a:r>
+          </a:p>
+        </p:txBody>
+      </p:sp>
+      <p:pic>
+        <p:nvPicPr>
+          <p:cNvPr id="16" name="Picture 15" descr="shot_run.png"/>
+          <p:cNvPicPr>
+            <a:picLocks noChangeAspect="1"/>
+          </p:cNvPicPr>
+          <p:nvPr/>
+        </p:nvPicPr>
+        <p:blipFill>
+          <a:blip r:embed="rId2"/>
+          <a:stretch>
+            <a:fillRect/>
+          </a:stretch>
+        </p:blipFill>
+        <p:spPr>
+          <a:xfrm>
+            <a:off x="964038" y="1773936"/>
+            <a:ext cx="4472722" cy="1956816"/>
+          </a:xfrm>
+          <a:prstGeom prst="rect">
+            <a:avLst/>
+          </a:prstGeom>
+        </p:spPr>
+      </p:pic>
+      <p:sp>
+        <p:nvSpPr>
+          <p:cNvPr id="17" name="Rectangle 16"/>
+          <p:cNvSpPr/>
+          <p:nvPr/>
+        </p:nvSpPr>
+        <p:spPr>
+          <a:xfrm>
+            <a:off x="6327648" y="1481328"/>
+            <a:ext cx="5486400" cy="2304288"/>
+          </a:xfrm>
+          <a:prstGeom prst="rect">
+            <a:avLst/>
+          </a:prstGeom>
+          <a:solidFill>
+            <a:srgbClr val="FFFFFF"/>
+          </a:solidFill>
+          <a:ln>
+            <a:solidFill>
+              <a:srgbClr val="D6DCE4"/>
+            </a:solidFill>
+          </a:ln>
+          <a:effectLst/>
+        </p:spPr>
+        <p:style>
+          <a:lnRef idx="1">
+            <a:schemeClr val="accent1"/>
+          </a:lnRef>
+          <a:fillRef idx="3">
+            <a:schemeClr val="accent1"/>
+          </a:fillRef>
+          <a:effectRef idx="2">
+            <a:schemeClr val="accent1"/>
+          </a:effectRef>
+          <a:fontRef idx="minor">
+            <a:schemeClr val="lt1"/>
+          </a:fontRef>
+        </p:style>
+        <p:txBody>
+          <a:bodyPr rtlCol="0" anchor="ctr" wrap="square"/>
+          <a:lstStyle/>
+          <a:p>
+            <a:pPr algn="ctr"/>
+          </a:p>
+        </p:txBody>
+      </p:sp>
+      <p:sp>
+        <p:nvSpPr>
+          <p:cNvPr id="18" name="TextBox 17"/>
+          <p:cNvSpPr txBox="1"/>
+          <p:nvPr/>
+        </p:nvSpPr>
+        <p:spPr>
+          <a:xfrm>
+            <a:off x="6400800" y="1517904"/>
+            <a:ext cx="5340096" cy="237744"/>
+          </a:xfrm>
+          <a:prstGeom prst="rect">
+            <a:avLst/>
+          </a:prstGeom>
+          <a:noFill/>
+        </p:spPr>
+        <p:txBody>
+          <a:bodyPr wrap="square">
+            <a:spAutoFit/>
+          </a:bodyPr>
+          <a:lstStyle/>
+          <a:p>
+            <a:r>
+              <a:rPr sz="950" b="1">
+                <a:solidFill>
+                  <a:srgbClr val="010328"/>
+                </a:solidFill>
+                <a:latin typeface="微软雅黑"/>
+              </a:rPr>
+              <a:t>② pytest 全绿终端输出（逐字捕获）</a:t>
+            </a:r>
+          </a:p>
+        </p:txBody>
+      </p:sp>
+      <p:pic>
+        <p:nvPicPr>
+          <p:cNvPr id="19" name="Picture 18" descr="shot_test.png"/>
+          <p:cNvPicPr>
+            <a:picLocks noChangeAspect="1"/>
+          </p:cNvPicPr>
+          <p:nvPr/>
+        </p:nvPicPr>
+        <p:blipFill>
+          <a:blip r:embed="rId3"/>
+          <a:stretch>
+            <a:fillRect/>
+          </a:stretch>
+        </p:blipFill>
+        <p:spPr>
+          <a:xfrm>
+            <a:off x="6834486" y="1773936"/>
+            <a:ext cx="4472722" cy="1956816"/>
+          </a:xfrm>
+          <a:prstGeom prst="rect">
+            <a:avLst/>
+          </a:prstGeom>
+        </p:spPr>
+      </p:pic>
+      <p:sp>
+        <p:nvSpPr>
+          <p:cNvPr id="20" name="Rectangle 19"/>
+          <p:cNvSpPr/>
+          <p:nvPr/>
+        </p:nvSpPr>
+        <p:spPr>
+          <a:xfrm>
+            <a:off x="457200" y="3877056"/>
+            <a:ext cx="5486400" cy="2304288"/>
+          </a:xfrm>
+          <a:prstGeom prst="rect">
+            <a:avLst/>
+          </a:prstGeom>
+          <a:solidFill>
+            <a:srgbClr val="FFFFFF"/>
+          </a:solidFill>
+          <a:ln>
+            <a:solidFill>
+              <a:srgbClr val="D6DCE4"/>
+            </a:solidFill>
+          </a:ln>
+          <a:effectLst/>
+        </p:spPr>
+        <p:style>
+          <a:lnRef idx="1">
+            <a:schemeClr val="accent1"/>
+          </a:lnRef>
+          <a:fillRef idx="3">
+            <a:schemeClr val="accent1"/>
+          </a:fillRef>
+          <a:effectRef idx="2">
+            <a:schemeClr val="accent1"/>
+          </a:effectRef>
+          <a:fontRef idx="minor">
+            <a:schemeClr val="lt1"/>
+          </a:fontRef>
+        </p:style>
+        <p:txBody>
+          <a:bodyPr rtlCol="0" anchor="ctr" wrap="square"/>
+          <a:lstStyle/>
+          <a:p>
+            <a:pPr algn="ctr"/>
+          </a:p>
+        </p:txBody>
+      </p:sp>
+      <p:sp>
+        <p:nvSpPr>
+          <p:cNvPr id="21" name="TextBox 20"/>
+          <p:cNvSpPr txBox="1"/>
+          <p:nvPr/>
+        </p:nvSpPr>
+        <p:spPr>
+          <a:xfrm>
+            <a:off x="530352" y="3913632"/>
+            <a:ext cx="5340096" cy="237744"/>
+          </a:xfrm>
+          <a:prstGeom prst="rect">
+            <a:avLst/>
+          </a:prstGeom>
+          <a:noFill/>
+        </p:spPr>
+        <p:txBody>
+          <a:bodyPr wrap="square">
+            <a:spAutoFit/>
+          </a:bodyPr>
+          <a:lstStyle/>
+          <a:p>
+            <a:r>
+              <a:rPr sz="950" b="1">
+                <a:solidFill>
+                  <a:srgbClr val="010328"/>
+                </a:solidFill>
+                <a:latin typeface="微软雅黑"/>
+              </a:rPr>
+              <a:t>③ report.txt「验收档位判定（实测）」段</a:t>
+            </a:r>
+          </a:p>
+        </p:txBody>
+      </p:sp>
+      <p:pic>
+        <p:nvPicPr>
+          <p:cNvPr id="22" name="Picture 21" descr="shot_report.png"/>
+          <p:cNvPicPr>
+            <a:picLocks noChangeAspect="1"/>
+          </p:cNvPicPr>
+          <p:nvPr/>
+        </p:nvPicPr>
+        <p:blipFill>
+          <a:blip r:embed="rId4"/>
+          <a:stretch>
+            <a:fillRect/>
+          </a:stretch>
+        </p:blipFill>
+        <p:spPr>
+          <a:xfrm>
+            <a:off x="964038" y="4169664"/>
+            <a:ext cx="4472722" cy="1956816"/>
+          </a:xfrm>
+          <a:prstGeom prst="rect">
+            <a:avLst/>
+          </a:prstGeom>
+        </p:spPr>
+      </p:pic>
+      <p:sp>
+        <p:nvSpPr>
+          <p:cNvPr id="23" name="Rectangle 22"/>
+          <p:cNvSpPr/>
+          <p:nvPr/>
+        </p:nvSpPr>
+        <p:spPr>
+          <a:xfrm>
+            <a:off x="6327648" y="3877056"/>
+            <a:ext cx="5486400" cy="2304288"/>
+          </a:xfrm>
+          <a:prstGeom prst="rect">
+            <a:avLst/>
+          </a:prstGeom>
+          <a:solidFill>
+            <a:srgbClr val="F7F9FB"/>
+          </a:solidFill>
+          <a:ln>
+            <a:solidFill>
+              <a:srgbClr val="D6DCE4"/>
+            </a:solidFill>
+          </a:ln>
+          <a:effectLst/>
+        </p:spPr>
+        <p:style>
+          <a:lnRef idx="1">
+            <a:schemeClr val="accent1"/>
+          </a:lnRef>
+          <a:fillRef idx="3">
+            <a:schemeClr val="accent1"/>
+          </a:fillRef>
+          <a:effectRef idx="2">
+            <a:schemeClr val="accent1"/>
+          </a:effectRef>
+          <a:fontRef idx="minor">
+            <a:schemeClr val="lt1"/>
+          </a:fontRef>
+        </p:style>
+        <p:txBody>
+          <a:bodyPr rtlCol="0" anchor="ctr" wrap="square"/>
+          <a:lstStyle/>
+          <a:p>
+            <a:pPr algn="ctr"/>
+          </a:p>
+        </p:txBody>
+      </p:sp>
+      <p:sp>
+        <p:nvSpPr>
+          <p:cNvPr id="24" name="TextBox 23"/>
+          <p:cNvSpPr txBox="1"/>
+          <p:nvPr/>
+        </p:nvSpPr>
+        <p:spPr>
+          <a:xfrm>
+            <a:off x="6400800" y="3913632"/>
+            <a:ext cx="5340096" cy="237744"/>
+          </a:xfrm>
+          <a:prstGeom prst="rect">
+            <a:avLst/>
+          </a:prstGeom>
+          <a:noFill/>
+        </p:spPr>
+        <p:txBody>
+          <a:bodyPr wrap="square">
+            <a:spAutoFit/>
+          </a:bodyPr>
+          <a:lstStyle/>
+          <a:p>
+            <a:r>
+              <a:rPr sz="950" b="1">
+                <a:solidFill>
+                  <a:srgbClr val="010328"/>
+                </a:solidFill>
+                <a:latin typeface="微软雅黑"/>
+              </a:rPr>
+              <a:t>④ 采集口径（可复现）</a:t>
+            </a:r>
+          </a:p>
+        </p:txBody>
+      </p:sp>
+      <p:sp>
+        <p:nvSpPr>
+          <p:cNvPr id="25" name="TextBox 24"/>
+          <p:cNvSpPr txBox="1"/>
+          <p:nvPr/>
+        </p:nvSpPr>
+        <p:spPr>
+          <a:xfrm>
+            <a:off x="6437376" y="4187952"/>
+            <a:ext cx="5266944" cy="1920240"/>
+          </a:xfrm>
+          <a:prstGeom prst="rect">
+            <a:avLst/>
+          </a:prstGeom>
+          <a:noFill/>
+        </p:spPr>
+        <p:txBody>
+          <a:bodyPr wrap="square">
+            <a:spAutoFit/>
+          </a:bodyPr>
+          <a:lstStyle/>
+          <a:p>
+            <a:r>
+              <a:rPr sz="950" b="0">
+                <a:solidFill>
+                  <a:srgbClr val="2B2F36"/>
+                </a:solidFill>
+                <a:latin typeface="微软雅黑"/>
+              </a:rPr>
+              <a:t>项目：05-AI应用基础48课时版/工程化项目/m11a_data_quality/</a:t>
+            </a:r>
+          </a:p>
+          <a:p>
+            <a:r>
+              <a:rPr sz="950" b="0">
+                <a:solidFill>
+                  <a:srgbClr val="2B2F36"/>
+                </a:solidFill>
+                <a:latin typeface="微软雅黑"/>
+              </a:rPr>
+              <a:t>命令：/opt/anaconda3/bin/python run.py ｜ /opt/anaconda3/bin/python -m pytest -q</a:t>
+            </a:r>
+          </a:p>
+          <a:p>
+            <a:r>
+              <a:rPr sz="950" b="0">
+                <a:solidFill>
+                  <a:srgbClr val="2B2F36"/>
+                </a:solidFill>
+                <a:latin typeface="微软雅黑"/>
+              </a:rPr>
+              <a:t>采集：工具/ppt97/capture97.py（2026-10-28 10:47 真跑逐字捕获输出）</a:t>
+            </a:r>
+          </a:p>
+          <a:p>
+            <a:r>
+              <a:rPr sz="950" b="0">
+                <a:solidFill>
+                  <a:srgbClr val="2B2F36"/>
+                </a:solidFill>
+                <a:latin typeface="微软雅黑"/>
+              </a:rPr>
+              <a:t>渲染：工具/ppt97/terminal_png.py（终端截图，不改写任何数字）</a:t>
+            </a:r>
+          </a:p>
+          <a:p>
+            <a:r>
+              <a:rPr sz="950" b="0">
+                <a:solidFill>
+                  <a:srgbClr val="2B2F36"/>
+                </a:solidFill>
+                <a:latin typeface="微软雅黑"/>
+              </a:rPr>
+              <a:t>退出码：run=0 ｜ pytest=0</a:t>
+            </a:r>
+          </a:p>
+          <a:p>
+            <a:r>
+              <a:rPr sz="950" b="0">
+                <a:solidFill>
+                  <a:srgbClr val="2B2F36"/>
+                </a:solidFill>
+                <a:latin typeface="微软雅黑"/>
+              </a:rPr>
+              <a:t>档位判定取自 output/report.txt「验收档位判定（实测）」段</a:t>
+            </a:r>
+          </a:p>
+        </p:txBody>
+      </p:sp>
+      <p:sp>
+        <p:nvSpPr>
+          <p:cNvPr id="26" name="TextBox 25"/>
+          <p:cNvSpPr txBox="1"/>
+          <p:nvPr/>
+        </p:nvSpPr>
+        <p:spPr>
+          <a:xfrm>
+            <a:off x="457200" y="6254496"/>
+            <a:ext cx="11247120" cy="201168"/>
+          </a:xfrm>
+          <a:prstGeom prst="rect">
+            <a:avLst/>
+          </a:prstGeom>
+          <a:noFill/>
+        </p:spPr>
+        <p:txBody>
+          <a:bodyPr wrap="square">
+            <a:spAutoFit/>
+          </a:bodyPr>
+          <a:lstStyle/>
+          <a:p>
+            <a:r>
+              <a:rPr sz="900" b="0">
+                <a:solidFill>
+                  <a:srgbClr val="7A8698"/>
+                </a:solidFill>
+                <a:latin typeface="微软雅黑"/>
+              </a:rPr>
+              <a:t>截图内容逐字取自 工具/ppt97/evidence/m11a_data_quality/（capture97.py 真跑捕获，未改写数字）</a:t>
+            </a:r>
+          </a:p>
+        </p:txBody>
+      </p:sp>
+    </p:spTree>
+  </p:cSld>
+  <p:clrMapOvr>
+    <a:masterClrMapping/>
+  </p:clrMapOvr>
+</p:sld>
+</file>
+
 <file path=ppt/slides/slide7.xml><?xml version="1.0" encoding="utf-8"?>
 <p:sld xmlns:a="http://schemas.openxmlformats.org/drawingml/2006/main" xmlns:r="http://schemas.openxmlformats.org/officeDocument/2006/relationships" xmlns:p="http://schemas.openxmlformats.org/presentationml/2006/main">
   <p:cSld>
@@ -64835,9 +66993,9 @@
                 <a:solidFill>
                   <a:srgbClr val="8A97B5"/>
                 </a:solidFill>
-                <a:latin typeface="微软雅黑" panose="020B0503020204020204" charset="-122"/>
-              </a:rPr>
-              <a:t>7 / 64</a:t>
+                <a:latin typeface="微软雅黑"/>
+              </a:rPr>
+              <a:t>7 / 66</a:t>
             </a:r>
             <a:endParaRPr sz="1000" b="0">
               <a:solidFill>
@@ -65873,9 +68031,9 @@
                 <a:solidFill>
                   <a:srgbClr val="8A97B5"/>
                 </a:solidFill>
-                <a:latin typeface="微软雅黑" panose="020B0503020204020204" charset="-122"/>
-              </a:rPr>
-              <a:t>8 / 64</a:t>
+                <a:latin typeface="微软雅黑"/>
+              </a:rPr>
+              <a:t>8 / 66</a:t>
             </a:r>
             <a:endParaRPr sz="1000" b="0">
               <a:solidFill>
@@ -66794,9 +68952,9 @@
                 <a:solidFill>
                   <a:srgbClr val="8A97B5"/>
                 </a:solidFill>
-                <a:latin typeface="微软雅黑" panose="020B0503020204020204" charset="-122"/>
-              </a:rPr>
-              <a:t>9 / 64</a:t>
+                <a:latin typeface="微软雅黑"/>
+              </a:rPr>
+              <a:t>9 / 66</a:t>
             </a:r>
             <a:endParaRPr sz="1000" b="0">
               <a:solidFill>
